--- a/docgen/操作説明書.pptx
+++ b/docgen/操作説明書.pptx
@@ -34,9 +34,11 @@
     <p:sldId id="282" r:id="rId28"/>
     <p:sldId id="283" r:id="rId29"/>
     <p:sldId id="284" r:id="rId30"/>
+    <p:sldId id="285" r:id="rId31"/>
+    <p:sldId id="286" r:id="rId32"/>
   </p:sldIdLst>
   <p:notesMasterIdLst>
-    <p:notesMasterId r:id="rId31"/>
+    <p:notesMasterId r:id="rId33"/>
   </p:notesMasterIdLst>
   <p:sldSz cx="12192000" cy="6858000"/>
   <p:notesSz cx="6858000" cy="12192000"/>
@@ -2490,6 +2492,182 @@
             <a:fld id="{F7021451-1387-4CA6-816F-3879F97B5CBC}" type="slidenum">
               <a:rPr lang="en-US"/>
               <a:t>3</a:t>
+            </a:fld>
+            <a:endParaRPr lang="en-US"/>
+          </a:p>
+        </p:txBody>
+      </p:sp>
+    </p:spTree>
+    <p:extLst>
+      <p:ext uri="{BB962C8B-B14F-4D97-AF65-F5344CB8AC3E}">
+        <p14:creationId xmlns:p14="http://schemas.microsoft.com/office/powerpoint/2010/main" val="1024086991"/>
+      </p:ext>
+    </p:extLst>
+  </p:cSld>
+  <p:clrMapOvr>
+    <a:masterClrMapping/>
+  </p:clrMapOvr>
+</p:notes>
+</file>
+
+<file path=ppt/notesSlides/notesSlide30.xml><?xml version="1.0" encoding="utf-8"?>
+<p:notes xmlns:a="http://schemas.openxmlformats.org/drawingml/2006/main" xmlns:r="http://schemas.openxmlformats.org/officeDocument/2006/relationships" xmlns:p="http://schemas.openxmlformats.org/presentationml/2006/main">
+  <p:cSld>
+    <p:spTree>
+      <p:nvGrpSpPr>
+        <p:cNvPr id="1" name=""/>
+        <p:cNvGrpSpPr/>
+        <p:nvPr/>
+      </p:nvGrpSpPr>
+      <p:grpSpPr>
+        <a:xfrm>
+          <a:off x="0" y="0"/>
+          <a:ext cx="0" cy="0"/>
+          <a:chOff x="0" y="0"/>
+          <a:chExt cx="0" cy="0"/>
+        </a:xfrm>
+      </p:grpSpPr>
+      <p:sp>
+        <p:nvSpPr>
+          <p:cNvPr id="2" name="Slide Image Placeholder 1"/>
+          <p:cNvSpPr>
+            <a:spLocks noGrp="1" noRot="1" noChangeAspect="1"/>
+          </p:cNvSpPr>
+          <p:nvPr>
+            <p:ph type="sldImg"/>
+          </p:nvPr>
+        </p:nvSpPr>
+        <p:spPr/>
+      </p:sp>
+      <p:sp>
+        <p:nvSpPr>
+          <p:cNvPr id="3" name="Notes Placeholder 2"/>
+          <p:cNvSpPr>
+            <a:spLocks noGrp="1"/>
+          </p:cNvSpPr>
+          <p:nvPr>
+            <p:ph type="body" idx="1"/>
+          </p:nvPr>
+        </p:nvSpPr>
+        <p:spPr/>
+        <p:txBody>
+          <a:bodyPr/>
+          <a:lstStyle/>
+          <a:p>
+            <a:r>
+              <a:rPr lang="en-US" dirty="0"/>
+              <a:t/>
+            </a:r>
+            <a:endParaRPr lang="en-US" dirty="0"/>
+          </a:p>
+        </p:txBody>
+      </p:sp>
+      <p:sp>
+        <p:nvSpPr>
+          <p:cNvPr id="4" name="Slide Number Placeholder 3"/>
+          <p:cNvSpPr>
+            <a:spLocks noGrp="1"/>
+          </p:cNvSpPr>
+          <p:nvPr>
+            <p:ph type="sldNum" sz="quarter" idx="10"/>
+          </p:nvPr>
+        </p:nvSpPr>
+        <p:spPr/>
+        <p:txBody>
+          <a:bodyPr/>
+          <a:lstStyle/>
+          <a:p>
+            <a:fld id="{F7021451-1387-4CA6-816F-3879F97B5CBC}" type="slidenum">
+              <a:rPr lang="en-US"/>
+              <a:t>30</a:t>
+            </a:fld>
+            <a:endParaRPr lang="en-US"/>
+          </a:p>
+        </p:txBody>
+      </p:sp>
+    </p:spTree>
+    <p:extLst>
+      <p:ext uri="{BB962C8B-B14F-4D97-AF65-F5344CB8AC3E}">
+        <p14:creationId xmlns:p14="http://schemas.microsoft.com/office/powerpoint/2010/main" val="1024086991"/>
+      </p:ext>
+    </p:extLst>
+  </p:cSld>
+  <p:clrMapOvr>
+    <a:masterClrMapping/>
+  </p:clrMapOvr>
+</p:notes>
+</file>
+
+<file path=ppt/notesSlides/notesSlide31.xml><?xml version="1.0" encoding="utf-8"?>
+<p:notes xmlns:a="http://schemas.openxmlformats.org/drawingml/2006/main" xmlns:r="http://schemas.openxmlformats.org/officeDocument/2006/relationships" xmlns:p="http://schemas.openxmlformats.org/presentationml/2006/main">
+  <p:cSld>
+    <p:spTree>
+      <p:nvGrpSpPr>
+        <p:cNvPr id="1" name=""/>
+        <p:cNvGrpSpPr/>
+        <p:nvPr/>
+      </p:nvGrpSpPr>
+      <p:grpSpPr>
+        <a:xfrm>
+          <a:off x="0" y="0"/>
+          <a:ext cx="0" cy="0"/>
+          <a:chOff x="0" y="0"/>
+          <a:chExt cx="0" cy="0"/>
+        </a:xfrm>
+      </p:grpSpPr>
+      <p:sp>
+        <p:nvSpPr>
+          <p:cNvPr id="2" name="Slide Image Placeholder 1"/>
+          <p:cNvSpPr>
+            <a:spLocks noGrp="1" noRot="1" noChangeAspect="1"/>
+          </p:cNvSpPr>
+          <p:nvPr>
+            <p:ph type="sldImg"/>
+          </p:nvPr>
+        </p:nvSpPr>
+        <p:spPr/>
+      </p:sp>
+      <p:sp>
+        <p:nvSpPr>
+          <p:cNvPr id="3" name="Notes Placeholder 2"/>
+          <p:cNvSpPr>
+            <a:spLocks noGrp="1"/>
+          </p:cNvSpPr>
+          <p:nvPr>
+            <p:ph type="body" idx="1"/>
+          </p:nvPr>
+        </p:nvSpPr>
+        <p:spPr/>
+        <p:txBody>
+          <a:bodyPr/>
+          <a:lstStyle/>
+          <a:p>
+            <a:r>
+              <a:rPr lang="en-US" dirty="0"/>
+              <a:t/>
+            </a:r>
+            <a:endParaRPr lang="en-US" dirty="0"/>
+          </a:p>
+        </p:txBody>
+      </p:sp>
+      <p:sp>
+        <p:nvSpPr>
+          <p:cNvPr id="4" name="Slide Number Placeholder 3"/>
+          <p:cNvSpPr>
+            <a:spLocks noGrp="1"/>
+          </p:cNvSpPr>
+          <p:nvPr>
+            <p:ph type="sldNum" sz="quarter" idx="10"/>
+          </p:nvPr>
+        </p:nvSpPr>
+        <p:spPr/>
+        <p:txBody>
+          <a:bodyPr/>
+          <a:lstStyle/>
+          <a:p>
+            <a:fld id="{F7021451-1387-4CA6-816F-3879F97B5CBC}" type="slidenum">
+              <a:rPr lang="en-US"/>
+              <a:t>31</a:t>
             </a:fld>
             <a:endParaRPr lang="en-US"/>
           </a:p>
@@ -3463,7 +3641,7 @@
                 <a:ea typeface="Meiryo" pitchFamily="34" charset="-122"/>
                 <a:cs typeface="Meiryo" pitchFamily="34" charset="-120"/>
               </a:rPr>
-              <a:t>genba-mvp / Version 1.0 / 2026年7月</a:t>
+              <a:t>genba-mvp / Version 1.1 / 2026年8月(Googleログイン・2段階認証を追加)</a:t>
             </a:r>
             <a:endParaRPr lang="en-US" sz="1800" dirty="0"/>
           </a:p>
@@ -3612,7 +3790,7 @@
                 <a:ea typeface="Meiryo" pitchFamily="34" charset="-122"/>
                 <a:cs typeface="Meiryo" pitchFamily="34" charset="-120"/>
               </a:rPr>
-              <a:t>現場全体を一画面で把握する</a:t>
+              <a:t>現場(チーム)を作る</a:t>
             </a:r>
             <a:endParaRPr lang="en-US" sz="2600" dirty="0"/>
           </a:p>
@@ -3679,7 +3857,7 @@
                 <a:ea typeface="Meiryo" pitchFamily="34" charset="-122"/>
                 <a:cs typeface="Meiryo" pitchFamily="34" charset="-120"/>
               </a:rPr>
-              <a:t>KPIカード: 勤務中・休憩中・開始前・退勤済み・休憩不足の人数が一目でわかる</a:t>
+              <a:t>「チーム一覧」画面の「＋チーム作成」から、現場名・会場名・開催日を入力</a:t>
             </a:r>
             <a:endParaRPr lang="en-US" sz="1600" dirty="0"/>
           </a:p>
@@ -3700,7 +3878,7 @@
                 <a:ea typeface="Meiryo" pitchFamily="34" charset="-122"/>
                 <a:cs typeface="Meiryo" pitchFamily="34" charset="-120"/>
               </a:rPr>
-              <a:t>アラート: 休憩不足や配置の空きを自動で検出して知らせる</a:t>
+              <a:t>AI提案を使いたい場合はスイッチをON(課金プランが必要です)</a:t>
             </a:r>
             <a:endParaRPr lang="en-US" sz="1600" dirty="0"/>
           </a:p>
@@ -3721,7 +3899,7 @@
                 <a:ea typeface="Meiryo" pitchFamily="34" charset="-122"/>
                 <a:cs typeface="Meiryo" pitchFamily="34" charset="-120"/>
               </a:rPr>
-              <a:t>AI提案: 状況を分析したおすすめの対応が表示され、「適用」で即反映できる</a:t>
+              <a:t>作成すると、参加用のQRコードと共有URLが発行されます</a:t>
             </a:r>
             <a:endParaRPr lang="en-US" sz="1600" dirty="0"/>
           </a:p>
@@ -3742,7 +3920,28 @@
                 <a:ea typeface="Meiryo" pitchFamily="34" charset="-122"/>
                 <a:cs typeface="Meiryo" pitchFamily="34" charset="-120"/>
               </a:rPr>
-              <a:t>配置サマリー・スタッフ状況・チャット・通知の最新も同じ画面で確認できる</a:t>
+              <a:t>URLをLINE等でスタッフに共有するだけで、相手はアカウント不要ですぐ参加できます</a:t>
+            </a:r>
+            <a:endParaRPr lang="en-US" sz="1600" dirty="0"/>
+          </a:p>
+          <a:p>
+            <a:pPr marL="228600" indent="-228600">
+              <a:spcAft>
+                <a:spcPts val="1000"/>
+              </a:spcAft>
+              <a:buSzPct val="100000"/>
+              <a:buChar char="●"/>
+            </a:pPr>
+            <a:r>
+              <a:rPr lang="en-US" sz="1600" dirty="0">
+                <a:solidFill>
+                  <a:srgbClr val="333333"/>
+                </a:solidFill>
+                <a:latin typeface="Meiryo" pitchFamily="34" charset="0"/>
+                <a:ea typeface="Meiryo" pitchFamily="34" charset="-122"/>
+                <a:cs typeface="Meiryo" pitchFamily="34" charset="-120"/>
+              </a:rPr>
+              <a:t>チーム作成には利用回数の制限があります(プラン・課金画面で確認できます)</a:t>
             </a:r>
             <a:endParaRPr lang="en-US" sz="1600" dirty="0"/>
           </a:p>
@@ -3852,7 +4051,7 @@
                 <a:ea typeface="Meiryo" pitchFamily="34" charset="-122"/>
                 <a:cs typeface="Meiryo" pitchFamily="34" charset="-120"/>
               </a:rPr>
-              <a:t>勤務・休憩</a:t>
+              <a:t>Command Center(管理者向け)</a:t>
             </a:r>
             <a:endParaRPr lang="en-US" sz="3400" dirty="0"/>
           </a:p>
@@ -3962,7 +4161,7 @@
                 <a:ea typeface="Meiryo" pitchFamily="34" charset="-122"/>
                 <a:cs typeface="Meiryo" pitchFamily="34" charset="-120"/>
               </a:rPr>
-              <a:t>自分の勤務・休憩を記録する</a:t>
+              <a:t>現場全体を一画面で把握する</a:t>
             </a:r>
             <a:endParaRPr lang="en-US" sz="2600" dirty="0"/>
           </a:p>
@@ -4029,7 +4228,7 @@
                 <a:ea typeface="Meiryo" pitchFamily="34" charset="-122"/>
                 <a:cs typeface="Meiryo" pitchFamily="34" charset="-120"/>
               </a:rPr>
-              <a:t>「マイ勤務」画面が本人操作の中心。ボタン操作は不要で、予定時刻になると自動的に「勤務中」になる</a:t>
+              <a:t>KPIカード: 勤務中・休憩中・開始前・退勤済み・休憩不足の人数が一目でわかる</a:t>
             </a:r>
             <a:endParaRPr lang="en-US" sz="1600" dirty="0"/>
           </a:p>
@@ -4050,7 +4249,7 @@
                 <a:ea typeface="Meiryo" pitchFamily="34" charset="-122"/>
                 <a:cs typeface="Meiryo" pitchFamily="34" charset="-120"/>
               </a:rPr>
-              <a:t>休憩は「休憩開始」ボタンを押すだけ。何度でも分割して取得できる</a:t>
+              <a:t>アラート: 休憩不足や配置の空きを自動で検出して知らせる</a:t>
             </a:r>
             <a:endParaRPr lang="en-US" sz="1600" dirty="0"/>
           </a:p>
@@ -4071,7 +4270,7 @@
                 <a:ea typeface="Meiryo" pitchFamily="34" charset="-122"/>
                 <a:cs typeface="Meiryo" pitchFamily="34" charset="-120"/>
               </a:rPr>
-              <a:t>必要休憩時間は勤務予定に応じて自動計算(6時間以上で45分、8時間以上で60分)</a:t>
+              <a:t>AI提案: 状況を分析したおすすめの対応が表示され、「適用」で即反映できる</a:t>
             </a:r>
             <a:endParaRPr lang="en-US" sz="1600" dirty="0"/>
           </a:p>
@@ -4092,28 +4291,7 @@
                 <a:ea typeface="Meiryo" pitchFamily="34" charset="-122"/>
                 <a:cs typeface="Meiryo" pitchFamily="34" charset="-120"/>
               </a:rPr>
-              <a:t>休憩が足りない場合は責任者側に自動でアラートが届く</a:t>
-            </a:r>
-            <a:endParaRPr lang="en-US" sz="1600" dirty="0"/>
-          </a:p>
-          <a:p>
-            <a:pPr marL="228600" indent="-228600">
-              <a:spcAft>
-                <a:spcPts val="1000"/>
-              </a:spcAft>
-              <a:buSzPct val="100000"/>
-              <a:buChar char="●"/>
-            </a:pPr>
-            <a:r>
-              <a:rPr lang="en-US" sz="1600" dirty="0">
-                <a:solidFill>
-                  <a:srgbClr val="333333"/>
-                </a:solidFill>
-                <a:latin typeface="Meiryo" pitchFamily="34" charset="0"/>
-                <a:ea typeface="Meiryo" pitchFamily="34" charset="-122"/>
-                <a:cs typeface="Meiryo" pitchFamily="34" charset="-120"/>
-              </a:rPr>
-              <a:t>勤務が終わったら「退勤する」ボタンを押す(管理者が代わりに記録することも可能)</a:t>
+              <a:t>配置サマリー・スタッフ状況・チャット・通知の最新も同じ画面で確認できる</a:t>
             </a:r>
             <a:endParaRPr lang="en-US" sz="1600" dirty="0"/>
           </a:p>
@@ -4223,7 +4401,7 @@
                 <a:ea typeface="Meiryo" pitchFamily="34" charset="-122"/>
                 <a:cs typeface="Meiryo" pitchFamily="34" charset="-120"/>
               </a:rPr>
-              <a:t>配置管理(管理者向け)</a:t>
+              <a:t>勤務・休憩</a:t>
             </a:r>
             <a:endParaRPr lang="en-US" sz="3400" dirty="0"/>
           </a:p>
@@ -4333,7 +4511,7 @@
                 <a:ea typeface="Meiryo" pitchFamily="34" charset="-122"/>
                 <a:cs typeface="Meiryo" pitchFamily="34" charset="-120"/>
               </a:rPr>
-              <a:t>持ち場にスタッフを配置する</a:t>
+              <a:t>自分の勤務・休憩を記録する</a:t>
             </a:r>
             <a:endParaRPr lang="en-US" sz="2600" dirty="0"/>
           </a:p>
@@ -4400,7 +4578,7 @@
                 <a:ea typeface="Meiryo" pitchFamily="34" charset="-122"/>
                 <a:cs typeface="Meiryo" pitchFamily="34" charset="-120"/>
               </a:rPr>
-              <a:t>「配置管理」画面で、スタッフごとに開始・終了時刻と配置名(持ち場)を登録</a:t>
+              <a:t>「マイ勤務」画面が本人操作の中心。ボタン操作は不要で、予定時刻になると自動的に「勤務中」になる</a:t>
             </a:r>
             <a:endParaRPr lang="en-US" sz="1600" dirty="0"/>
           </a:p>
@@ -4421,7 +4599,7 @@
                 <a:ea typeface="Meiryo" pitchFamily="34" charset="-122"/>
                 <a:cs typeface="Meiryo" pitchFamily="34" charset="-120"/>
               </a:rPr>
-              <a:t>配置はよく使う持ち場名から選択、または自由入力ができる</a:t>
+              <a:t>休憩は「休憩開始」ボタンを押すだけ。何度でも分割して取得できる</a:t>
             </a:r>
             <a:endParaRPr lang="en-US" sz="1600" dirty="0"/>
           </a:p>
@@ -4442,7 +4620,7 @@
                 <a:ea typeface="Meiryo" pitchFamily="34" charset="-122"/>
                 <a:cs typeface="Meiryo" pitchFamily="34" charset="-120"/>
               </a:rPr>
-              <a:t>「タイムライン」画面で、全員の勤務・配置・休憩を時系列でまとめて確認できる</a:t>
+              <a:t>必要休憩時間は勤務予定に応じて自動計算(6時間以上で45分、8時間以上で60分)</a:t>
             </a:r>
             <a:endParaRPr lang="en-US" sz="1600" dirty="0"/>
           </a:p>
@@ -4463,7 +4641,28 @@
                 <a:ea typeface="Meiryo" pitchFamily="34" charset="-122"/>
                 <a:cs typeface="Meiryo" pitchFamily="34" charset="-120"/>
               </a:rPr>
-              <a:t>配置の変更・削除はすべて監査ログに記録され、後から確認できる</a:t>
+              <a:t>休憩が足りない場合は責任者側に自動でアラートが届く</a:t>
+            </a:r>
+            <a:endParaRPr lang="en-US" sz="1600" dirty="0"/>
+          </a:p>
+          <a:p>
+            <a:pPr marL="228600" indent="-228600">
+              <a:spcAft>
+                <a:spcPts val="1000"/>
+              </a:spcAft>
+              <a:buSzPct val="100000"/>
+              <a:buChar char="●"/>
+            </a:pPr>
+            <a:r>
+              <a:rPr lang="en-US" sz="1600" dirty="0">
+                <a:solidFill>
+                  <a:srgbClr val="333333"/>
+                </a:solidFill>
+                <a:latin typeface="Meiryo" pitchFamily="34" charset="0"/>
+                <a:ea typeface="Meiryo" pitchFamily="34" charset="-122"/>
+                <a:cs typeface="Meiryo" pitchFamily="34" charset="-120"/>
+              </a:rPr>
+              <a:t>勤務が終わったら「退勤する」ボタンを押す(管理者が代わりに記録することも可能)</a:t>
             </a:r>
             <a:endParaRPr lang="en-US" sz="1600" dirty="0"/>
           </a:p>
@@ -4573,7 +4772,7 @@
                 <a:ea typeface="Meiryo" pitchFamily="34" charset="-122"/>
                 <a:cs typeface="Meiryo" pitchFamily="34" charset="-120"/>
               </a:rPr>
-              <a:t>ポイント投票・バッジ</a:t>
+              <a:t>配置管理(管理者向け)</a:t>
             </a:r>
             <a:endParaRPr lang="en-US" sz="3400" dirty="0"/>
           </a:p>
@@ -4683,7 +4882,7 @@
                 <a:ea typeface="Meiryo" pitchFamily="34" charset="-122"/>
                 <a:cs typeface="Meiryo" pitchFamily="34" charset="-120"/>
               </a:rPr>
-              <a:t>現場の活躍を称え合う</a:t>
+              <a:t>持ち場にスタッフを配置する</a:t>
             </a:r>
             <a:endParaRPr lang="en-US" sz="2600" dirty="0"/>
           </a:p>
@@ -4750,7 +4949,7 @@
                 <a:ea typeface="Meiryo" pitchFamily="34" charset="-122"/>
                 <a:cs typeface="Meiryo" pitchFamily="34" charset="-120"/>
               </a:rPr>
-              <a:t>現場終了後、自分以外の1名に「ポイント投票」で投票する(1人1回)</a:t>
+              <a:t>「配置管理」画面で、スタッフごとに開始・終了時刻と配置名(持ち場)を登録</a:t>
             </a:r>
             <a:endParaRPr lang="en-US" sz="1600" dirty="0"/>
           </a:p>
@@ -4771,7 +4970,7 @@
                 <a:ea typeface="Meiryo" pitchFamily="34" charset="-122"/>
                 <a:cs typeface="Meiryo" pitchFamily="34" charset="-120"/>
               </a:rPr>
-              <a:t>管理者が投票を締め切ると、得票順に1位3P・2位2P・3位1Pが確定する</a:t>
+              <a:t>配置はよく使う持ち場名から選択、または自由入力ができる</a:t>
             </a:r>
             <a:endParaRPr lang="en-US" sz="1600" dirty="0"/>
           </a:p>
@@ -4792,7 +4991,7 @@
                 <a:ea typeface="Meiryo" pitchFamily="34" charset="-122"/>
                 <a:cs typeface="Meiryo" pitchFamily="34" charset="-120"/>
               </a:rPr>
-              <a:t>獲得ポイントはアカウントに累計され、マイページでいつでも確認できる</a:t>
+              <a:t>「タイムライン」画面で、全員の勤務・配置・休憩を時系列でまとめて確認できる</a:t>
             </a:r>
             <a:endParaRPr lang="en-US" sz="1600" dirty="0"/>
           </a:p>
@@ -4813,28 +5012,7 @@
                 <a:ea typeface="Meiryo" pitchFamily="34" charset="-122"/>
                 <a:cs typeface="Meiryo" pitchFamily="34" charset="-120"/>
               </a:rPr>
-              <a:t>MVPバッジ・初ポイント・休憩マスター・累計10P到達などのバッジが自動で付与される</a:t>
-            </a:r>
-            <a:endParaRPr lang="en-US" sz="1600" dirty="0"/>
-          </a:p>
-          <a:p>
-            <a:pPr marL="228600" indent="-228600">
-              <a:spcAft>
-                <a:spcPts val="1000"/>
-              </a:spcAft>
-              <a:buSzPct val="100000"/>
-              <a:buChar char="●"/>
-            </a:pPr>
-            <a:r>
-              <a:rPr lang="en-US" sz="1600" dirty="0">
-                <a:solidFill>
-                  <a:srgbClr val="333333"/>
-                </a:solidFill>
-                <a:latin typeface="Meiryo" pitchFamily="34" charset="0"/>
-                <a:ea typeface="Meiryo" pitchFamily="34" charset="-122"/>
-                <a:cs typeface="Meiryo" pitchFamily="34" charset="-120"/>
-              </a:rPr>
-              <a:t>獲得したバッジは、マイページから「名前の前に表示するバッジ」として選べる</a:t>
+              <a:t>配置の変更・削除はすべて監査ログに記録され、後から確認できる</a:t>
             </a:r>
             <a:endParaRPr lang="en-US" sz="1600" dirty="0"/>
           </a:p>
@@ -4944,7 +5122,7 @@
                 <a:ea typeface="Meiryo" pitchFamily="34" charset="-122"/>
                 <a:cs typeface="Meiryo" pitchFamily="34" charset="-120"/>
               </a:rPr>
-              <a:t>AI提案</a:t>
+              <a:t>ポイント投票・バッジ</a:t>
             </a:r>
             <a:endParaRPr lang="en-US" sz="3400" dirty="0"/>
           </a:p>
@@ -5054,7 +5232,7 @@
                 <a:ea typeface="Meiryo" pitchFamily="34" charset="-122"/>
                 <a:cs typeface="Meiryo" pitchFamily="34" charset="-120"/>
               </a:rPr>
-              <a:t>AIに現場運営のヒントをもらう</a:t>
+              <a:t>現場の活躍を称え合う</a:t>
             </a:r>
             <a:endParaRPr lang="en-US" sz="2600" dirty="0"/>
           </a:p>
@@ -5121,7 +5299,7 @@
                 <a:ea typeface="Meiryo" pitchFamily="34" charset="-122"/>
                 <a:cs typeface="Meiryo" pitchFamily="34" charset="-120"/>
               </a:rPr>
-              <a:t>Command Centerまたは「AI提案」画面で「再分析」を押すと、現在の状況をAIが分析</a:t>
+              <a:t>現場終了後、自分以外の1名に「ポイント投票」で投票する(1人1回)</a:t>
             </a:r>
             <a:endParaRPr lang="en-US" sz="1600" dirty="0"/>
           </a:p>
@@ -5142,7 +5320,7 @@
                 <a:ea typeface="Meiryo" pitchFamily="34" charset="-122"/>
                 <a:cs typeface="Meiryo" pitchFamily="34" charset="-120"/>
               </a:rPr>
-              <a:t>休憩不足の解消案や、配置が空いている持ち場への提案が表示される</a:t>
+              <a:t>管理者が投票を締め切ると、得票順に1位3P・2位2P・3位1Pが確定する</a:t>
             </a:r>
             <a:endParaRPr lang="en-US" sz="1600" dirty="0"/>
           </a:p>
@@ -5163,7 +5341,7 @@
                 <a:ea typeface="Meiryo" pitchFamily="34" charset="-122"/>
                 <a:cs typeface="Meiryo" pitchFamily="34" charset="-120"/>
               </a:rPr>
-              <a:t>「この提案を配置に適用する」を押すと、そのまま配置として登録される</a:t>
+              <a:t>獲得ポイントはアカウントに累計され、マイページでいつでも確認できる</a:t>
             </a:r>
             <a:endParaRPr lang="en-US" sz="1600" dirty="0"/>
           </a:p>
@@ -5184,7 +5362,7 @@
                 <a:ea typeface="Meiryo" pitchFamily="34" charset="-122"/>
                 <a:cs typeface="Meiryo" pitchFamily="34" charset="-120"/>
               </a:rPr>
-              <a:t>AI未接続時は自動でルールベースの提案に切り替わるため、機能が止まることはない</a:t>
+              <a:t>MVPバッジ・初ポイント・休憩マスター・累計10P到達などのバッジが自動で付与される</a:t>
             </a:r>
             <a:endParaRPr lang="en-US" sz="1600" dirty="0"/>
           </a:p>
@@ -5205,7 +5383,7 @@
                 <a:ea typeface="Meiryo" pitchFamily="34" charset="-122"/>
                 <a:cs typeface="Meiryo" pitchFamily="34" charset="-120"/>
               </a:rPr>
-              <a:t>利用には課金プラン(月額またはクレジット)が必要です</a:t>
+              <a:t>獲得したバッジは、マイページから「名前の前に表示するバッジ」として選べる</a:t>
             </a:r>
             <a:endParaRPr lang="en-US" sz="1600" dirty="0"/>
           </a:p>
@@ -5315,7 +5493,7 @@
                 <a:ea typeface="Meiryo" pitchFamily="34" charset="-122"/>
                 <a:cs typeface="Meiryo" pitchFamily="34" charset="-120"/>
               </a:rPr>
-              <a:t>チャット・通知</a:t>
+              <a:t>AI提案</a:t>
             </a:r>
             <a:endParaRPr lang="en-US" sz="3400" dirty="0"/>
           </a:p>
@@ -5534,7 +5712,7 @@
                 <a:ea typeface="Meiryo" pitchFamily="34" charset="-122"/>
                 <a:cs typeface="Meiryo" pitchFamily="34" charset="-120"/>
               </a:rPr>
-              <a:t>3. チーム作成(オーナー向け)</a:t>
+              <a:t>3. Googleログイン・2段階認証</a:t>
             </a:r>
             <a:endParaRPr lang="en-US" sz="1600" dirty="0"/>
           </a:p>
@@ -5555,7 +5733,7 @@
                 <a:ea typeface="Meiryo" pitchFamily="34" charset="-122"/>
                 <a:cs typeface="Meiryo" pitchFamily="34" charset="-120"/>
               </a:rPr>
-              <a:t>4. Command Center(管理者向け)</a:t>
+              <a:t>4. チーム作成(オーナー向け)</a:t>
             </a:r>
             <a:endParaRPr lang="en-US" sz="1600" dirty="0"/>
           </a:p>
@@ -5576,7 +5754,7 @@
                 <a:ea typeface="Meiryo" pitchFamily="34" charset="-122"/>
                 <a:cs typeface="Meiryo" pitchFamily="34" charset="-120"/>
               </a:rPr>
-              <a:t>5. 勤務・休憩</a:t>
+              <a:t>5. Command Center(管理者向け)</a:t>
             </a:r>
             <a:endParaRPr lang="en-US" sz="1600" dirty="0"/>
           </a:p>
@@ -5597,7 +5775,7 @@
                 <a:ea typeface="Meiryo" pitchFamily="34" charset="-122"/>
                 <a:cs typeface="Meiryo" pitchFamily="34" charset="-120"/>
               </a:rPr>
-              <a:t>6. 配置管理(管理者向け)</a:t>
+              <a:t>6. 勤務・休憩</a:t>
             </a:r>
             <a:endParaRPr lang="en-US" sz="1600" dirty="0"/>
           </a:p>
@@ -5618,7 +5796,7 @@
                 <a:ea typeface="Meiryo" pitchFamily="34" charset="-122"/>
                 <a:cs typeface="Meiryo" pitchFamily="34" charset="-120"/>
               </a:rPr>
-              <a:t>7. ポイント投票・バッジ</a:t>
+              <a:t>7. 配置管理(管理者向け)</a:t>
             </a:r>
             <a:endParaRPr lang="en-US" sz="1600" dirty="0"/>
           </a:p>
@@ -5661,7 +5839,7 @@
                 <a:ea typeface="Meiryo" pitchFamily="34" charset="-122"/>
                 <a:cs typeface="Meiryo" pitchFamily="34" charset="-120"/>
               </a:rPr>
-              <a:t>8. AI提案</a:t>
+              <a:t>8. ポイント投票・バッジ</a:t>
             </a:r>
             <a:endParaRPr lang="en-US" sz="1600" dirty="0"/>
           </a:p>
@@ -5682,7 +5860,7 @@
                 <a:ea typeface="Meiryo" pitchFamily="34" charset="-122"/>
                 <a:cs typeface="Meiryo" pitchFamily="34" charset="-120"/>
               </a:rPr>
-              <a:t>9. チャット・通知</a:t>
+              <a:t>9. AI提案</a:t>
             </a:r>
             <a:endParaRPr lang="en-US" sz="1600" dirty="0"/>
           </a:p>
@@ -5703,7 +5881,7 @@
                 <a:ea typeface="Meiryo" pitchFamily="34" charset="-122"/>
                 <a:cs typeface="Meiryo" pitchFamily="34" charset="-120"/>
               </a:rPr>
-              <a:t>10. マイページ</a:t>
+              <a:t>10. チャット・通知</a:t>
             </a:r>
             <a:endParaRPr lang="en-US" sz="1600" dirty="0"/>
           </a:p>
@@ -5724,7 +5902,7 @@
                 <a:ea typeface="Meiryo" pitchFamily="34" charset="-122"/>
                 <a:cs typeface="Meiryo" pitchFamily="34" charset="-120"/>
               </a:rPr>
-              <a:t>11. プラン・課金</a:t>
+              <a:t>11. マイページ</a:t>
             </a:r>
             <a:endParaRPr lang="en-US" sz="1600" dirty="0"/>
           </a:p>
@@ -5745,7 +5923,7 @@
                 <a:ea typeface="Meiryo" pitchFamily="34" charset="-122"/>
                 <a:cs typeface="Meiryo" pitchFamily="34" charset="-120"/>
               </a:rPr>
-              <a:t>12. 管理ページ(サイト管理者向け)</a:t>
+              <a:t>12. プラン・課金</a:t>
             </a:r>
             <a:endParaRPr lang="en-US" sz="1600" dirty="0"/>
           </a:p>
@@ -5766,7 +5944,28 @@
                 <a:ea typeface="Meiryo" pitchFamily="34" charset="-122"/>
                 <a:cs typeface="Meiryo" pitchFamily="34" charset="-120"/>
               </a:rPr>
-              <a:t>13. よくある質問</a:t>
+              <a:t>13. 管理ページ(サイト管理者向け)</a:t>
+            </a:r>
+            <a:endParaRPr lang="en-US" sz="1600" dirty="0"/>
+          </a:p>
+          <a:p>
+            <a:pPr marL="228600" indent="-228600">
+              <a:spcAft>
+                <a:spcPts val="1000"/>
+              </a:spcAft>
+              <a:buSzPct val="100000"/>
+              <a:buChar char="●"/>
+            </a:pPr>
+            <a:r>
+              <a:rPr lang="en-US" sz="1600" dirty="0">
+                <a:solidFill>
+                  <a:srgbClr val="333333"/>
+                </a:solidFill>
+                <a:latin typeface="Meiryo" pitchFamily="34" charset="0"/>
+                <a:ea typeface="Meiryo" pitchFamily="34" charset="-122"/>
+                <a:cs typeface="Meiryo" pitchFamily="34" charset="-120"/>
+              </a:rPr>
+              <a:t>14. よくある質問</a:t>
             </a:r>
             <a:endParaRPr lang="en-US" sz="1600" dirty="0"/>
           </a:p>
@@ -5876,7 +6075,7 @@
                 <a:ea typeface="Meiryo" pitchFamily="34" charset="-122"/>
                 <a:cs typeface="Meiryo" pitchFamily="34" charset="-120"/>
               </a:rPr>
-              <a:t>現場内のやり取り</a:t>
+              <a:t>AIに現場運営のヒントをもらう</a:t>
             </a:r>
             <a:endParaRPr lang="en-US" sz="2600" dirty="0"/>
           </a:p>
@@ -5943,7 +6142,7 @@
                 <a:ea typeface="Meiryo" pitchFamily="34" charset="-122"/>
                 <a:cs typeface="Meiryo" pitchFamily="34" charset="-120"/>
               </a:rPr>
-              <a:t>「チャット」画面はチーム全員が参加できる現場内チャット</a:t>
+              <a:t>Command Centerまたは「AI提案」画面で「再分析」を押すと、現在の状況をAIが分析</a:t>
             </a:r>
             <a:endParaRPr lang="en-US" sz="1600" dirty="0"/>
           </a:p>
@@ -5964,7 +6163,7 @@
                 <a:ea typeface="Meiryo" pitchFamily="34" charset="-122"/>
                 <a:cs typeface="Meiryo" pitchFamily="34" charset="-120"/>
               </a:rPr>
-              <a:t>スタンプで素早く返信できる</a:t>
+              <a:t>休憩不足の解消案や、配置が空いている持ち場への提案が表示される</a:t>
             </a:r>
             <a:endParaRPr lang="en-US" sz="1600" dirty="0"/>
           </a:p>
@@ -5985,7 +6184,7 @@
                 <a:ea typeface="Meiryo" pitchFamily="34" charset="-122"/>
                 <a:cs typeface="Meiryo" pitchFamily="34" charset="-120"/>
               </a:rPr>
-              <a:t>管理者は「通知」画面から一斉連絡・緊急連絡を全員に送信できる</a:t>
+              <a:t>「この提案を配置に適用する」を押すと、そのまま配置として登録される</a:t>
             </a:r>
             <a:endParaRPr lang="en-US" sz="1600" dirty="0"/>
           </a:p>
@@ -6006,7 +6205,28 @@
                 <a:ea typeface="Meiryo" pitchFamily="34" charset="-122"/>
                 <a:cs typeface="Meiryo" pitchFamily="34" charset="-120"/>
               </a:rPr>
-              <a:t>システムからの自動通知(休憩終了・バッジ獲得など)も同じ画面に届く</a:t>
+              <a:t>AI未接続時は自動でルールベースの提案に切り替わるため、機能が止まることはない</a:t>
+            </a:r>
+            <a:endParaRPr lang="en-US" sz="1600" dirty="0"/>
+          </a:p>
+          <a:p>
+            <a:pPr marL="228600" indent="-228600">
+              <a:spcAft>
+                <a:spcPts val="1000"/>
+              </a:spcAft>
+              <a:buSzPct val="100000"/>
+              <a:buChar char="●"/>
+            </a:pPr>
+            <a:r>
+              <a:rPr lang="en-US" sz="1600" dirty="0">
+                <a:solidFill>
+                  <a:srgbClr val="333333"/>
+                </a:solidFill>
+                <a:latin typeface="Meiryo" pitchFamily="34" charset="0"/>
+                <a:ea typeface="Meiryo" pitchFamily="34" charset="-122"/>
+                <a:cs typeface="Meiryo" pitchFamily="34" charset="-120"/>
+              </a:rPr>
+              <a:t>利用には課金プラン(月額またはクレジット)が必要です</a:t>
             </a:r>
             <a:endParaRPr lang="en-US" sz="1600" dirty="0"/>
           </a:p>
@@ -6116,7 +6336,7 @@
                 <a:ea typeface="Meiryo" pitchFamily="34" charset="-122"/>
                 <a:cs typeface="Meiryo" pitchFamily="34" charset="-120"/>
               </a:rPr>
-              <a:t>マイページ</a:t>
+              <a:t>チャット・通知</a:t>
             </a:r>
             <a:endParaRPr lang="en-US" sz="3400" dirty="0"/>
           </a:p>
@@ -6226,7 +6446,7 @@
                 <a:ea typeface="Meiryo" pitchFamily="34" charset="-122"/>
                 <a:cs typeface="Meiryo" pitchFamily="34" charset="-120"/>
               </a:rPr>
-              <a:t>自分の実績を確認する</a:t>
+              <a:t>現場内のやり取り</a:t>
             </a:r>
             <a:endParaRPr lang="en-US" sz="2600" dirty="0"/>
           </a:p>
@@ -6293,7 +6513,7 @@
                 <a:ea typeface="Meiryo" pitchFamily="34" charset="-122"/>
                 <a:cs typeface="Meiryo" pitchFamily="34" charset="-120"/>
               </a:rPr>
-              <a:t>ヘッダーの「マイページ」から、チームに参加しなくても実績を確認できる</a:t>
+              <a:t>「チャット」画面はチーム全員が参加できる現場内チャット</a:t>
             </a:r>
             <a:endParaRPr lang="en-US" sz="1600" dirty="0"/>
           </a:p>
@@ -6314,7 +6534,7 @@
                 <a:ea typeface="Meiryo" pitchFamily="34" charset="-122"/>
                 <a:cs typeface="Meiryo" pitchFamily="34" charset="-120"/>
               </a:rPr>
-              <a:t>累計ポイント・累計勤務時間・参加現場数・獲得バッジの一覧が見られる</a:t>
+              <a:t>スタンプで素早く返信できる</a:t>
             </a:r>
             <a:endParaRPr lang="en-US" sz="1600" dirty="0"/>
           </a:p>
@@ -6335,7 +6555,28 @@
                 <a:ea typeface="Meiryo" pitchFamily="34" charset="-122"/>
                 <a:cs typeface="Meiryo" pitchFamily="34" charset="-120"/>
               </a:rPr>
-              <a:t>過去に参加した現場の履歴(順位・獲得ポイント)も確認できる</a:t>
+              <a:t>管理者は「通知」画面から一斉連絡・緊急連絡を全員に送信できる</a:t>
+            </a:r>
+            <a:endParaRPr lang="en-US" sz="1600" dirty="0"/>
+          </a:p>
+          <a:p>
+            <a:pPr marL="228600" indent="-228600">
+              <a:spcAft>
+                <a:spcPts val="1000"/>
+              </a:spcAft>
+              <a:buSzPct val="100000"/>
+              <a:buChar char="●"/>
+            </a:pPr>
+            <a:r>
+              <a:rPr lang="en-US" sz="1600" dirty="0">
+                <a:solidFill>
+                  <a:srgbClr val="333333"/>
+                </a:solidFill>
+                <a:latin typeface="Meiryo" pitchFamily="34" charset="0"/>
+                <a:ea typeface="Meiryo" pitchFamily="34" charset="-122"/>
+                <a:cs typeface="Meiryo" pitchFamily="34" charset="-120"/>
+              </a:rPr>
+              <a:t>システムからの自動通知(休憩終了・バッジ獲得など)も同じ画面に届く</a:t>
             </a:r>
             <a:endParaRPr lang="en-US" sz="1600" dirty="0"/>
           </a:p>
@@ -6445,7 +6686,7 @@
                 <a:ea typeface="Meiryo" pitchFamily="34" charset="-122"/>
                 <a:cs typeface="Meiryo" pitchFamily="34" charset="-120"/>
               </a:rPr>
-              <a:t>プラン・課金</a:t>
+              <a:t>マイページ</a:t>
             </a:r>
             <a:endParaRPr lang="en-US" sz="3400" dirty="0"/>
           </a:p>
@@ -6555,7 +6796,7 @@
                 <a:ea typeface="Meiryo" pitchFamily="34" charset="-122"/>
                 <a:cs typeface="Meiryo" pitchFamily="34" charset="-120"/>
               </a:rPr>
-              <a:t>プランの確認と利用枠の管理</a:t>
+              <a:t>自分の実績を確認する</a:t>
             </a:r>
             <a:endParaRPr lang="en-US" sz="2600" dirty="0"/>
           </a:p>
@@ -6622,7 +6863,7 @@
                 <a:ea typeface="Meiryo" pitchFamily="34" charset="-122"/>
                 <a:cs typeface="Meiryo" pitchFamily="34" charset="-120"/>
               </a:rPr>
-              <a:t>「プラン」画面で、月額プラン(¥980/月)とクレジット(10/50/100回分)を比較・選択できる</a:t>
+              <a:t>ヘッダーの「マイページ」から、チームに参加しなくても実績を確認できる</a:t>
             </a:r>
             <a:endParaRPr lang="en-US" sz="1600" dirty="0"/>
           </a:p>
@@ -6643,7 +6884,7 @@
                 <a:ea typeface="Meiryo" pitchFamily="34" charset="-122"/>
                 <a:cs typeface="Meiryo" pitchFamily="34" charset="-120"/>
               </a:rPr>
-              <a:t>決済機能の準備が整うまでの間は、毎月クレジット50回分が全アカウントに自動付与される</a:t>
+              <a:t>累計ポイント・累計勤務時間・参加現場数・獲得バッジの一覧が見られる</a:t>
             </a:r>
             <a:endParaRPr lang="en-US" sz="1600" dirty="0"/>
           </a:p>
@@ -6664,28 +6905,7 @@
                 <a:ea typeface="Meiryo" pitchFamily="34" charset="-122"/>
                 <a:cs typeface="Meiryo" pitchFamily="34" charset="-120"/>
               </a:rPr>
-              <a:t>貯めたポイントを150P消費して、AI提案が1日使い放題になる「デイパス」と交換できる</a:t>
-            </a:r>
-            <a:endParaRPr lang="en-US" sz="1600" dirty="0"/>
-          </a:p>
-          <a:p>
-            <a:pPr marL="228600" indent="-228600">
-              <a:spcAft>
-                <a:spcPts val="1000"/>
-              </a:spcAft>
-              <a:buSzPct val="100000"/>
-              <a:buChar char="●"/>
-            </a:pPr>
-            <a:r>
-              <a:rPr lang="en-US" sz="1600" dirty="0">
-                <a:solidFill>
-                  <a:srgbClr val="333333"/>
-                </a:solidFill>
-                <a:latin typeface="Meiryo" pitchFamily="34" charset="0"/>
-                <a:ea typeface="Meiryo" pitchFamily="34" charset="-122"/>
-                <a:cs typeface="Meiryo" pitchFamily="34" charset="-120"/>
-              </a:rPr>
-              <a:t>招待コードをお持ちの場合は、同画面の入力欄からコードを利用できる</a:t>
+              <a:t>過去に参加した現場の履歴(順位・獲得ポイント)も確認できる</a:t>
             </a:r>
             <a:endParaRPr lang="en-US" sz="1600" dirty="0"/>
           </a:p>
@@ -6795,7 +7015,7 @@
                 <a:ea typeface="Meiryo" pitchFamily="34" charset="-122"/>
                 <a:cs typeface="Meiryo" pitchFamily="34" charset="-120"/>
               </a:rPr>
-              <a:t>管理ページ(サイト管理者向け)</a:t>
+              <a:t>プラン・課金</a:t>
             </a:r>
             <a:endParaRPr lang="en-US" sz="3400" dirty="0"/>
           </a:p>
@@ -6905,7 +7125,7 @@
                 <a:ea typeface="Meiryo" pitchFamily="34" charset="-122"/>
                 <a:cs typeface="Meiryo" pitchFamily="34" charset="-120"/>
               </a:rPr>
-              <a:t>サービス全体の運営</a:t>
+              <a:t>プランの確認と利用枠の管理</a:t>
             </a:r>
             <a:endParaRPr lang="en-US" sz="2600" dirty="0"/>
           </a:p>
@@ -6972,7 +7192,7 @@
                 <a:ea typeface="Meiryo" pitchFamily="34" charset="-122"/>
                 <a:cs typeface="Meiryo" pitchFamily="34" charset="-120"/>
               </a:rPr>
-              <a:t>ヘッダーの「管理」は、指定されたメールアドレスでログインした場合のみ表示される</a:t>
+              <a:t>「プラン」画面で、月額プラン(¥980/月)とクレジット(10/50/100回分)を比較・選択できる</a:t>
             </a:r>
             <a:endParaRPr lang="en-US" sz="1600" dirty="0"/>
           </a:p>
@@ -6993,7 +7213,7 @@
                 <a:ea typeface="Meiryo" pitchFamily="34" charset="-122"/>
                 <a:cs typeface="Meiryo" pitchFamily="34" charset="-120"/>
               </a:rPr>
-              <a:t>「概要」タブ: 登録ユーザー数・チーム数・売上・入金履歴を確認</a:t>
+              <a:t>決済機能の準備が整うまでの間は、毎月クレジット50回分が全アカウントに自動付与される</a:t>
             </a:r>
             <a:endParaRPr lang="en-US" sz="1600" dirty="0"/>
           </a:p>
@@ -7014,7 +7234,7 @@
                 <a:ea typeface="Meiryo" pitchFamily="34" charset="-122"/>
                 <a:cs typeface="Meiryo" pitchFamily="34" charset="-120"/>
               </a:rPr>
-              <a:t>「招待コード」タブ: 友人向け無制限コード、またはクレジット付与コードを発行・管理</a:t>
+              <a:t>貯めたポイントを150P消費して、AI提案が1日使い放題になる「デイパス」と交換できる</a:t>
             </a:r>
             <a:endParaRPr lang="en-US" sz="1600" dirty="0"/>
           </a:p>
@@ -7035,7 +7255,7 @@
                 <a:ea typeface="Meiryo" pitchFamily="34" charset="-122"/>
                 <a:cs typeface="Meiryo" pitchFamily="34" charset="-120"/>
               </a:rPr>
-              <a:t>「ユーザー」タブ: 全ユーザーの契約状況・残高・実績を一覧で確認</a:t>
+              <a:t>招待コードをお持ちの場合は、同画面の入力欄からコードを利用できる</a:t>
             </a:r>
             <a:endParaRPr lang="en-US" sz="1600" dirty="0"/>
           </a:p>
@@ -7145,7 +7365,7 @@
                 <a:ea typeface="Meiryo" pitchFamily="34" charset="-122"/>
                 <a:cs typeface="Meiryo" pitchFamily="34" charset="-120"/>
               </a:rPr>
-              <a:t>よくある質問</a:t>
+              <a:t>管理ページ(サイト管理者向け)</a:t>
             </a:r>
             <a:endParaRPr lang="en-US" sz="3400" dirty="0"/>
           </a:p>
@@ -7216,7 +7436,7 @@
                 <a:ea typeface="Meiryo" pitchFamily="34" charset="-122"/>
                 <a:cs typeface="Meiryo" pitchFamily="34" charset="-120"/>
               </a:rPr>
-              <a:t>FAQ</a:t>
+              <a:t>使い方</a:t>
             </a:r>
             <a:endParaRPr lang="en-US" sz="1300" dirty="0"/>
           </a:p>
@@ -7255,7 +7475,7 @@
                 <a:ea typeface="Meiryo" pitchFamily="34" charset="-122"/>
                 <a:cs typeface="Meiryo" pitchFamily="34" charset="-120"/>
               </a:rPr>
-              <a:t>困ったときは</a:t>
+              <a:t>サービス全体の運営</a:t>
             </a:r>
             <a:endParaRPr lang="en-US" sz="2600" dirty="0"/>
           </a:p>
@@ -7287,41 +7507,14 @@
       </p:pic>
       <p:sp>
         <p:nvSpPr>
-          <p:cNvPr id="5" name="Shape 2"/>
+          <p:cNvPr id="5" name="Text 2"/>
           <p:cNvSpPr/>
           <p:nvPr/>
         </p:nvSpPr>
         <p:spPr>
           <a:xfrm>
             <a:off x="640080" y="1737360"/>
-            <a:ext cx="10881360" cy="960120"/>
-          </a:xfrm>
-          <a:prstGeom prst="roundRect">
-            <a:avLst>
-              <a:gd name="adj" fmla="val 7619"/>
-            </a:avLst>
-          </a:prstGeom>
-          <a:solidFill>
-            <a:srgbClr val="F4F5F8"/>
-          </a:solidFill>
-          <a:ln w="12700">
-            <a:solidFill>
-              <a:srgbClr val="E2E5EE"/>
-            </a:solidFill>
-            <a:prstDash val="solid"/>
-          </a:ln>
-        </p:spPr>
-      </p:sp>
-      <p:sp>
-        <p:nvSpPr>
-          <p:cNvPr id="6" name="Text 3"/>
-          <p:cNvSpPr/>
-          <p:nvPr/>
-        </p:nvSpPr>
-        <p:spPr>
-          <a:xfrm>
-            <a:off x="868680" y="1810512"/>
-            <a:ext cx="10424160" cy="365760"/>
+            <a:ext cx="10881360" cy="4389120"/>
           </a:xfrm>
           <a:prstGeom prst="rect">
             <a:avLst/>
@@ -7330,378 +7523,91 @@
           <a:ln/>
         </p:spPr>
         <p:txBody>
-          <a:bodyPr wrap="square" rtlCol="0" anchor="ctr"/>
-          <a:lstStyle/>
-          <a:p>
-            <a:pPr indent="0" marL="0">
-              <a:buNone/>
-            </a:pPr>
-            <a:r>
-              <a:rPr lang="en-US" sz="1400" b="1" dirty="0">
-                <a:solidFill>
-                  <a:srgbClr val="1B2333"/>
-                </a:solidFill>
-                <a:latin typeface="Meiryo" pitchFamily="34" charset="0"/>
-                <a:ea typeface="Meiryo" pitchFamily="34" charset="-122"/>
-                <a:cs typeface="Meiryo" pitchFamily="34" charset="-120"/>
-              </a:rPr>
-              <a:t>Q. 「プランを見る」が反応しない</a:t>
-            </a:r>
-            <a:endParaRPr lang="en-US" sz="1400" dirty="0"/>
-          </a:p>
-        </p:txBody>
-      </p:sp>
-      <p:sp>
-        <p:nvSpPr>
-          <p:cNvPr id="7" name="Text 4"/>
-          <p:cNvSpPr/>
-          <p:nvPr/>
-        </p:nvSpPr>
-        <p:spPr>
-          <a:xfrm>
-            <a:off x="868680" y="2194560"/>
-            <a:ext cx="10424160" cy="411480"/>
-          </a:xfrm>
-          <a:prstGeom prst="rect">
-            <a:avLst/>
-          </a:prstGeom>
-          <a:noFill/>
-          <a:ln/>
-        </p:spPr>
-        <p:txBody>
-          <a:bodyPr wrap="square" rtlCol="0" anchor="ctr"/>
-          <a:lstStyle/>
-          <a:p>
-            <a:pPr indent="0" marL="0">
-              <a:buNone/>
-            </a:pPr>
-            <a:r>
-              <a:rPr lang="en-US" sz="1300" dirty="0">
-                <a:solidFill>
-                  <a:srgbClr val="444444"/>
-                </a:solidFill>
-                <a:latin typeface="Meiryo" pitchFamily="34" charset="0"/>
-                <a:ea typeface="Meiryo" pitchFamily="34" charset="-122"/>
-                <a:cs typeface="Meiryo" pitchFamily="34" charset="-120"/>
-              </a:rPr>
-              <a:t>A. スマートフォンのブラウザキャッシュが古い可能性があります。一度タブを閉じて開き直してください</a:t>
-            </a:r>
-            <a:endParaRPr lang="en-US" sz="1300" dirty="0"/>
-          </a:p>
-        </p:txBody>
-      </p:sp>
-      <p:sp>
-        <p:nvSpPr>
-          <p:cNvPr id="8" name="Shape 5"/>
-          <p:cNvSpPr/>
-          <p:nvPr/>
-        </p:nvSpPr>
-        <p:spPr>
-          <a:xfrm>
-            <a:off x="640080" y="2880360"/>
-            <a:ext cx="10881360" cy="960120"/>
-          </a:xfrm>
-          <a:prstGeom prst="roundRect">
-            <a:avLst>
-              <a:gd name="adj" fmla="val 7619"/>
-            </a:avLst>
-          </a:prstGeom>
-          <a:solidFill>
-            <a:srgbClr val="F4F5F8"/>
-          </a:solidFill>
-          <a:ln w="12700">
-            <a:solidFill>
-              <a:srgbClr val="E2E5EE"/>
-            </a:solidFill>
-            <a:prstDash val="solid"/>
-          </a:ln>
-        </p:spPr>
-      </p:sp>
-      <p:sp>
-        <p:nvSpPr>
-          <p:cNvPr id="9" name="Text 6"/>
-          <p:cNvSpPr/>
-          <p:nvPr/>
-        </p:nvSpPr>
-        <p:spPr>
-          <a:xfrm>
-            <a:off x="868680" y="2953512"/>
-            <a:ext cx="10424160" cy="365760"/>
-          </a:xfrm>
-          <a:prstGeom prst="rect">
-            <a:avLst/>
-          </a:prstGeom>
-          <a:noFill/>
-          <a:ln/>
-        </p:spPr>
-        <p:txBody>
-          <a:bodyPr wrap="square" rtlCol="0" anchor="ctr"/>
-          <a:lstStyle/>
-          <a:p>
-            <a:pPr indent="0" marL="0">
-              <a:buNone/>
-            </a:pPr>
-            <a:r>
-              <a:rPr lang="en-US" sz="1400" b="1" dirty="0">
-                <a:solidFill>
-                  <a:srgbClr val="1B2333"/>
-                </a:solidFill>
-                <a:latin typeface="Meiryo" pitchFamily="34" charset="0"/>
-                <a:ea typeface="Meiryo" pitchFamily="34" charset="-122"/>
-                <a:cs typeface="Meiryo" pitchFamily="34" charset="-120"/>
-              </a:rPr>
-              <a:t>Q. チームを作成できない</a:t>
-            </a:r>
-            <a:endParaRPr lang="en-US" sz="1400" dirty="0"/>
-          </a:p>
-        </p:txBody>
-      </p:sp>
-      <p:sp>
-        <p:nvSpPr>
-          <p:cNvPr id="10" name="Text 7"/>
-          <p:cNvSpPr/>
-          <p:nvPr/>
-        </p:nvSpPr>
-        <p:spPr>
-          <a:xfrm>
-            <a:off x="868680" y="3337560"/>
-            <a:ext cx="10424160" cy="411480"/>
-          </a:xfrm>
-          <a:prstGeom prst="rect">
-            <a:avLst/>
-          </a:prstGeom>
-          <a:noFill/>
-          <a:ln/>
-        </p:spPr>
-        <p:txBody>
-          <a:bodyPr wrap="square" rtlCol="0" anchor="ctr"/>
-          <a:lstStyle/>
-          <a:p>
-            <a:pPr indent="0" marL="0">
-              <a:buNone/>
-            </a:pPr>
-            <a:r>
-              <a:rPr lang="en-US" sz="1300" dirty="0">
-                <a:solidFill>
-                  <a:srgbClr val="444444"/>
-                </a:solidFill>
-                <a:latin typeface="Meiryo" pitchFamily="34" charset="0"/>
-                <a:ea typeface="Meiryo" pitchFamily="34" charset="-122"/>
-                <a:cs typeface="Meiryo" pitchFamily="34" charset="-120"/>
-              </a:rPr>
-              <a:t>A. 無料枠(1日1件・月15件)を使い切っている可能性があります。プラン・課金画面で状況を確認してください</a:t>
-            </a:r>
-            <a:endParaRPr lang="en-US" sz="1300" dirty="0"/>
-          </a:p>
-        </p:txBody>
-      </p:sp>
-      <p:sp>
-        <p:nvSpPr>
-          <p:cNvPr id="11" name="Shape 8"/>
-          <p:cNvSpPr/>
-          <p:nvPr/>
-        </p:nvSpPr>
-        <p:spPr>
-          <a:xfrm>
-            <a:off x="640080" y="4023360"/>
-            <a:ext cx="10881360" cy="960120"/>
-          </a:xfrm>
-          <a:prstGeom prst="roundRect">
-            <a:avLst>
-              <a:gd name="adj" fmla="val 7619"/>
-            </a:avLst>
-          </a:prstGeom>
-          <a:solidFill>
-            <a:srgbClr val="F4F5F8"/>
-          </a:solidFill>
-          <a:ln w="12700">
-            <a:solidFill>
-              <a:srgbClr val="E2E5EE"/>
-            </a:solidFill>
-            <a:prstDash val="solid"/>
-          </a:ln>
-        </p:spPr>
-      </p:sp>
-      <p:sp>
-        <p:nvSpPr>
-          <p:cNvPr id="12" name="Text 9"/>
-          <p:cNvSpPr/>
-          <p:nvPr/>
-        </p:nvSpPr>
-        <p:spPr>
-          <a:xfrm>
-            <a:off x="868680" y="4096512"/>
-            <a:ext cx="10424160" cy="365760"/>
-          </a:xfrm>
-          <a:prstGeom prst="rect">
-            <a:avLst/>
-          </a:prstGeom>
-          <a:noFill/>
-          <a:ln/>
-        </p:spPr>
-        <p:txBody>
-          <a:bodyPr wrap="square" rtlCol="0" anchor="ctr"/>
-          <a:lstStyle/>
-          <a:p>
-            <a:pPr indent="0" marL="0">
-              <a:buNone/>
-            </a:pPr>
-            <a:r>
-              <a:rPr lang="en-US" sz="1400" b="1" dirty="0">
-                <a:solidFill>
-                  <a:srgbClr val="1B2333"/>
-                </a:solidFill>
-                <a:latin typeface="Meiryo" pitchFamily="34" charset="0"/>
-                <a:ea typeface="Meiryo" pitchFamily="34" charset="-122"/>
-                <a:cs typeface="Meiryo" pitchFamily="34" charset="-120"/>
-              </a:rPr>
-              <a:t>Q. AI提案が使えない</a:t>
-            </a:r>
-            <a:endParaRPr lang="en-US" sz="1400" dirty="0"/>
-          </a:p>
-        </p:txBody>
-      </p:sp>
-      <p:sp>
-        <p:nvSpPr>
-          <p:cNvPr id="13" name="Text 10"/>
-          <p:cNvSpPr/>
-          <p:nvPr/>
-        </p:nvSpPr>
-        <p:spPr>
-          <a:xfrm>
-            <a:off x="868680" y="4480560"/>
-            <a:ext cx="10424160" cy="411480"/>
-          </a:xfrm>
-          <a:prstGeom prst="rect">
-            <a:avLst/>
-          </a:prstGeom>
-          <a:noFill/>
-          <a:ln/>
-        </p:spPr>
-        <p:txBody>
-          <a:bodyPr wrap="square" rtlCol="0" anchor="ctr"/>
-          <a:lstStyle/>
-          <a:p>
-            <a:pPr indent="0" marL="0">
-              <a:buNone/>
-            </a:pPr>
-            <a:r>
-              <a:rPr lang="en-US" sz="1300" dirty="0">
-                <a:solidFill>
-                  <a:srgbClr val="444444"/>
-                </a:solidFill>
-                <a:latin typeface="Meiryo" pitchFamily="34" charset="0"/>
-                <a:ea typeface="Meiryo" pitchFamily="34" charset="-122"/>
-                <a:cs typeface="Meiryo" pitchFamily="34" charset="-120"/>
-              </a:rPr>
-              <a:t>A. チームの管理者設定でAI提案がOFFになっているか、利用枠が不足している可能性があります</a:t>
-            </a:r>
-            <a:endParaRPr lang="en-US" sz="1300" dirty="0"/>
-          </a:p>
-        </p:txBody>
-      </p:sp>
-      <p:sp>
-        <p:nvSpPr>
-          <p:cNvPr id="14" name="Shape 11"/>
-          <p:cNvSpPr/>
-          <p:nvPr/>
-        </p:nvSpPr>
-        <p:spPr>
-          <a:xfrm>
-            <a:off x="640080" y="5166360"/>
-            <a:ext cx="10881360" cy="960120"/>
-          </a:xfrm>
-          <a:prstGeom prst="roundRect">
-            <a:avLst>
-              <a:gd name="adj" fmla="val 7619"/>
-            </a:avLst>
-          </a:prstGeom>
-          <a:solidFill>
-            <a:srgbClr val="F4F5F8"/>
-          </a:solidFill>
-          <a:ln w="12700">
-            <a:solidFill>
-              <a:srgbClr val="E2E5EE"/>
-            </a:solidFill>
-            <a:prstDash val="solid"/>
-          </a:ln>
-        </p:spPr>
-      </p:sp>
-      <p:sp>
-        <p:nvSpPr>
-          <p:cNvPr id="15" name="Text 12"/>
-          <p:cNvSpPr/>
-          <p:nvPr/>
-        </p:nvSpPr>
-        <p:spPr>
-          <a:xfrm>
-            <a:off x="868680" y="5239512"/>
-            <a:ext cx="10424160" cy="365760"/>
-          </a:xfrm>
-          <a:prstGeom prst="rect">
-            <a:avLst/>
-          </a:prstGeom>
-          <a:noFill/>
-          <a:ln/>
-        </p:spPr>
-        <p:txBody>
-          <a:bodyPr wrap="square" rtlCol="0" anchor="ctr"/>
-          <a:lstStyle/>
-          <a:p>
-            <a:pPr indent="0" marL="0">
-              <a:buNone/>
-            </a:pPr>
-            <a:r>
-              <a:rPr lang="en-US" sz="1400" b="1" dirty="0">
-                <a:solidFill>
-                  <a:srgbClr val="1B2333"/>
-                </a:solidFill>
-                <a:latin typeface="Meiryo" pitchFamily="34" charset="0"/>
-                <a:ea typeface="Meiryo" pitchFamily="34" charset="-122"/>
-                <a:cs typeface="Meiryo" pitchFamily="34" charset="-120"/>
-              </a:rPr>
-              <a:t>Q. 招待されたのにチームが開けない</a:t>
-            </a:r>
-            <a:endParaRPr lang="en-US" sz="1400" dirty="0"/>
-          </a:p>
-        </p:txBody>
-      </p:sp>
-      <p:sp>
-        <p:nvSpPr>
-          <p:cNvPr id="16" name="Text 13"/>
-          <p:cNvSpPr/>
-          <p:nvPr/>
-        </p:nvSpPr>
-        <p:spPr>
-          <a:xfrm>
-            <a:off x="868680" y="5623560"/>
-            <a:ext cx="10424160" cy="411480"/>
-          </a:xfrm>
-          <a:prstGeom prst="rect">
-            <a:avLst/>
-          </a:prstGeom>
-          <a:noFill/>
-          <a:ln/>
-        </p:spPr>
-        <p:txBody>
-          <a:bodyPr wrap="square" rtlCol="0" anchor="ctr"/>
-          <a:lstStyle/>
-          <a:p>
-            <a:pPr indent="0" marL="0">
-              <a:buNone/>
-            </a:pPr>
-            <a:r>
-              <a:rPr lang="en-US" sz="1300" dirty="0">
-                <a:solidFill>
-                  <a:srgbClr val="444444"/>
-                </a:solidFill>
-                <a:latin typeface="Meiryo" pitchFamily="34" charset="0"/>
-                <a:ea typeface="Meiryo" pitchFamily="34" charset="-122"/>
-                <a:cs typeface="Meiryo" pitchFamily="34" charset="-120"/>
-              </a:rPr>
-              <a:t>A. QRコード・URLの有効期限切れ、またはチームが削除された可能性があります。発行者に確認してください</a:t>
-            </a:r>
-            <a:endParaRPr lang="en-US" sz="1300" dirty="0"/>
+          <a:bodyPr wrap="square" lIns="0" tIns="0" rIns="0" bIns="0" rtlCol="0" anchor="t"/>
+          <a:lstStyle/>
+          <a:p>
+            <a:pPr marL="228600" indent="-228600">
+              <a:spcAft>
+                <a:spcPts val="1000"/>
+              </a:spcAft>
+              <a:buSzPct val="100000"/>
+              <a:buChar char="●"/>
+            </a:pPr>
+            <a:r>
+              <a:rPr lang="en-US" sz="1600" dirty="0">
+                <a:solidFill>
+                  <a:srgbClr val="333333"/>
+                </a:solidFill>
+                <a:latin typeface="Meiryo" pitchFamily="34" charset="0"/>
+                <a:ea typeface="Meiryo" pitchFamily="34" charset="-122"/>
+                <a:cs typeface="Meiryo" pitchFamily="34" charset="-120"/>
+              </a:rPr>
+              <a:t>ヘッダーの「管理」は、指定されたメールアドレスでログインした場合のみ表示される</a:t>
+            </a:r>
+            <a:endParaRPr lang="en-US" sz="1600" dirty="0"/>
+          </a:p>
+          <a:p>
+            <a:pPr marL="228600" indent="-228600">
+              <a:spcAft>
+                <a:spcPts val="1000"/>
+              </a:spcAft>
+              <a:buSzPct val="100000"/>
+              <a:buChar char="●"/>
+            </a:pPr>
+            <a:r>
+              <a:rPr lang="en-US" sz="1600" dirty="0">
+                <a:solidFill>
+                  <a:srgbClr val="333333"/>
+                </a:solidFill>
+                <a:latin typeface="Meiryo" pitchFamily="34" charset="0"/>
+                <a:ea typeface="Meiryo" pitchFamily="34" charset="-122"/>
+                <a:cs typeface="Meiryo" pitchFamily="34" charset="-120"/>
+              </a:rPr>
+              <a:t>「概要」タブ: 登録ユーザー数・チーム数・売上・入金履歴を確認</a:t>
+            </a:r>
+            <a:endParaRPr lang="en-US" sz="1600" dirty="0"/>
+          </a:p>
+          <a:p>
+            <a:pPr marL="228600" indent="-228600">
+              <a:spcAft>
+                <a:spcPts val="1000"/>
+              </a:spcAft>
+              <a:buSzPct val="100000"/>
+              <a:buChar char="●"/>
+            </a:pPr>
+            <a:r>
+              <a:rPr lang="en-US" sz="1600" dirty="0">
+                <a:solidFill>
+                  <a:srgbClr val="333333"/>
+                </a:solidFill>
+                <a:latin typeface="Meiryo" pitchFamily="34" charset="0"/>
+                <a:ea typeface="Meiryo" pitchFamily="34" charset="-122"/>
+                <a:cs typeface="Meiryo" pitchFamily="34" charset="-120"/>
+              </a:rPr>
+              <a:t>「招待コード」タブ: 友人向け無制限コード、またはクレジット付与コードを発行・管理</a:t>
+            </a:r>
+            <a:endParaRPr lang="en-US" sz="1600" dirty="0"/>
+          </a:p>
+          <a:p>
+            <a:pPr marL="228600" indent="-228600">
+              <a:spcAft>
+                <a:spcPts val="1000"/>
+              </a:spcAft>
+              <a:buSzPct val="100000"/>
+              <a:buChar char="●"/>
+            </a:pPr>
+            <a:r>
+              <a:rPr lang="en-US" sz="1600" dirty="0">
+                <a:solidFill>
+                  <a:srgbClr val="333333"/>
+                </a:solidFill>
+                <a:latin typeface="Meiryo" pitchFamily="34" charset="0"/>
+                <a:ea typeface="Meiryo" pitchFamily="34" charset="-122"/>
+                <a:cs typeface="Meiryo" pitchFamily="34" charset="-120"/>
+              </a:rPr>
+              <a:t>「ユーザー」タブ: 全ユーザーの契約状況・残高・実績を一覧で確認</a:t>
+            </a:r>
+            <a:endParaRPr lang="en-US" sz="1600" dirty="0"/>
           </a:p>
         </p:txBody>
       </p:sp>
@@ -7719,7 +7625,7 @@
     <p:bg>
       <p:bgPr>
         <a:solidFill>
-          <a:srgbClr val="1B2333"/>
+          <a:srgbClr val="FFFFFF"/>
         </a:solidFill>
       </p:bgPr>
     </p:bg>
@@ -7737,40 +7643,16 @@
           <a:chExt cx="0" cy="0"/>
         </a:xfrm>
       </p:grpSpPr>
-      <p:pic>
-        <p:nvPicPr>
-          <p:cNvPr id="2" name="Image 0" descr="C:\Users\ytaka\Desktop\開発\休憩管理アプリ\genba-mvp\docgen\logo_cropped.png">    </p:cNvPr>
-          <p:cNvPicPr>
-            <a:picLocks noChangeAspect="1"/>
-          </p:cNvPicPr>
-          <p:nvPr/>
-        </p:nvPicPr>
-        <p:blipFill>
-          <a:blip r:embed="rId1"/>
-          <a:stretch>
-            <a:fillRect/>
-          </a:stretch>
-        </p:blipFill>
-        <p:spPr>
-          <a:xfrm>
-            <a:off x="4722876" y="2377440"/>
-            <a:ext cx="2743200" cy="895053"/>
-          </a:xfrm>
-          <a:prstGeom prst="rect">
-            <a:avLst/>
-          </a:prstGeom>
-        </p:spPr>
-      </p:pic>
-      <p:sp>
-        <p:nvSpPr>
-          <p:cNvPr id="3" name="Text 0"/>
+      <p:sp>
+        <p:nvSpPr>
+          <p:cNvPr id="2" name="Text 0"/>
           <p:cNvSpPr/>
           <p:nvPr/>
         </p:nvSpPr>
         <p:spPr>
           <a:xfrm>
-            <a:off x="640080" y="3840480"/>
-            <a:ext cx="10881360" cy="548640"/>
+            <a:off x="640080" y="2377440"/>
+            <a:ext cx="2743200" cy="914400"/>
           </a:xfrm>
           <a:prstGeom prst="rect">
             <a:avLst/>
@@ -7782,21 +7664,60 @@
           <a:bodyPr wrap="square" rtlCol="0" anchor="ctr"/>
           <a:lstStyle/>
           <a:p>
-            <a:pPr algn="ctr" indent="0" marL="0">
+            <a:pPr indent="0" marL="0">
               <a:buNone/>
             </a:pPr>
             <a:r>
-              <a:rPr lang="en-US" sz="1600" dirty="0">
-                <a:solidFill>
-                  <a:srgbClr val="AEB8D4"/>
-                </a:solidFill>
-                <a:latin typeface="Meiryo" pitchFamily="34" charset="0"/>
-                <a:ea typeface="Meiryo" pitchFamily="34" charset="-122"/>
-                <a:cs typeface="Meiryo" pitchFamily="34" charset="-120"/>
-              </a:rPr>
-              <a:t>ご不明な点はAster Systems(吉崎)までご連絡ください</a:t>
-            </a:r>
-            <a:endParaRPr lang="en-US" sz="1600" dirty="0"/>
+              <a:rPr lang="en-US" sz="2200" b="1" dirty="0">
+                <a:solidFill>
+                  <a:srgbClr val="C9A227"/>
+                </a:solidFill>
+                <a:latin typeface="Meiryo" pitchFamily="34" charset="0"/>
+                <a:ea typeface="Meiryo" pitchFamily="34" charset="-122"/>
+                <a:cs typeface="Meiryo" pitchFamily="34" charset="-120"/>
+              </a:rPr>
+              <a:t>14</a:t>
+            </a:r>
+            <a:endParaRPr lang="en-US" sz="2200" dirty="0"/>
+          </a:p>
+        </p:txBody>
+      </p:sp>
+      <p:sp>
+        <p:nvSpPr>
+          <p:cNvPr id="3" name="Text 1"/>
+          <p:cNvSpPr/>
+          <p:nvPr/>
+        </p:nvSpPr>
+        <p:spPr>
+          <a:xfrm>
+            <a:off x="640080" y="2834640"/>
+            <a:ext cx="10789920" cy="1280160"/>
+          </a:xfrm>
+          <a:prstGeom prst="rect">
+            <a:avLst/>
+          </a:prstGeom>
+          <a:noFill/>
+          <a:ln/>
+        </p:spPr>
+        <p:txBody>
+          <a:bodyPr wrap="square" rtlCol="0" anchor="ctr"/>
+          <a:lstStyle/>
+          <a:p>
+            <a:pPr indent="0" marL="0">
+              <a:buNone/>
+            </a:pPr>
+            <a:r>
+              <a:rPr lang="en-US" sz="3400" b="1" dirty="0">
+                <a:solidFill>
+                  <a:srgbClr val="1B2333"/>
+                </a:solidFill>
+                <a:latin typeface="Meiryo" pitchFamily="34" charset="0"/>
+                <a:ea typeface="Meiryo" pitchFamily="34" charset="-122"/>
+                <a:cs typeface="Meiryo" pitchFamily="34" charset="-120"/>
+              </a:rPr>
+              <a:t>よくある質問</a:t>
+            </a:r>
+            <a:endParaRPr lang="en-US" sz="3400" dirty="0"/>
           </a:p>
         </p:txBody>
       </p:sp>
@@ -7918,6 +7839,655 @@
 </p:sld>
 </file>
 
+<file path=ppt/slides/slide30.xml><?xml version="1.0" encoding="utf-8"?>
+<p:sld xmlns:a="http://schemas.openxmlformats.org/drawingml/2006/main" xmlns:r="http://schemas.openxmlformats.org/officeDocument/2006/relationships" xmlns:p="http://schemas.openxmlformats.org/presentationml/2006/main">
+  <p:cSld name="Slide 30">
+    <p:bg>
+      <p:bgPr>
+        <a:solidFill>
+          <a:srgbClr val="FFFFFF"/>
+        </a:solidFill>
+      </p:bgPr>
+    </p:bg>
+    <p:spTree>
+      <p:nvGrpSpPr>
+        <p:cNvPr id="1" name=""/>
+        <p:cNvGrpSpPr/>
+        <p:nvPr/>
+      </p:nvGrpSpPr>
+      <p:grpSpPr>
+        <a:xfrm>
+          <a:off x="0" y="0"/>
+          <a:ext cx="0" cy="0"/>
+          <a:chOff x="0" y="0"/>
+          <a:chExt cx="0" cy="0"/>
+        </a:xfrm>
+      </p:grpSpPr>
+      <p:sp>
+        <p:nvSpPr>
+          <p:cNvPr id="2" name="Text 0"/>
+          <p:cNvSpPr/>
+          <p:nvPr/>
+        </p:nvSpPr>
+        <p:spPr>
+          <a:xfrm>
+            <a:off x="640080" y="411480"/>
+            <a:ext cx="7315200" cy="365760"/>
+          </a:xfrm>
+          <a:prstGeom prst="rect">
+            <a:avLst/>
+          </a:prstGeom>
+          <a:noFill/>
+          <a:ln/>
+        </p:spPr>
+        <p:txBody>
+          <a:bodyPr wrap="square" rtlCol="0" anchor="ctr"/>
+          <a:lstStyle/>
+          <a:p>
+            <a:pPr indent="0" marL="0">
+              <a:buNone/>
+            </a:pPr>
+            <a:r>
+              <a:rPr lang="en-US" sz="1300" b="1" dirty="0">
+                <a:solidFill>
+                  <a:srgbClr val="C9A227"/>
+                </a:solidFill>
+                <a:latin typeface="Meiryo" pitchFamily="34" charset="0"/>
+                <a:ea typeface="Meiryo" pitchFamily="34" charset="-122"/>
+                <a:cs typeface="Meiryo" pitchFamily="34" charset="-120"/>
+              </a:rPr>
+              <a:t>FAQ</a:t>
+            </a:r>
+            <a:endParaRPr lang="en-US" sz="1300" dirty="0"/>
+          </a:p>
+        </p:txBody>
+      </p:sp>
+      <p:sp>
+        <p:nvSpPr>
+          <p:cNvPr id="3" name="Text 1"/>
+          <p:cNvSpPr/>
+          <p:nvPr/>
+        </p:nvSpPr>
+        <p:spPr>
+          <a:xfrm>
+            <a:off x="640080" y="731520"/>
+            <a:ext cx="10881360" cy="731520"/>
+          </a:xfrm>
+          <a:prstGeom prst="rect">
+            <a:avLst/>
+          </a:prstGeom>
+          <a:noFill/>
+          <a:ln/>
+        </p:spPr>
+        <p:txBody>
+          <a:bodyPr wrap="square" rtlCol="0" anchor="ctr"/>
+          <a:lstStyle/>
+          <a:p>
+            <a:pPr indent="0" marL="0">
+              <a:buNone/>
+            </a:pPr>
+            <a:r>
+              <a:rPr lang="en-US" sz="2600" b="1" dirty="0">
+                <a:solidFill>
+                  <a:srgbClr val="1B2333"/>
+                </a:solidFill>
+                <a:latin typeface="Meiryo" pitchFamily="34" charset="0"/>
+                <a:ea typeface="Meiryo" pitchFamily="34" charset="-122"/>
+                <a:cs typeface="Meiryo" pitchFamily="34" charset="-120"/>
+              </a:rPr>
+              <a:t>困ったときは</a:t>
+            </a:r>
+            <a:endParaRPr lang="en-US" sz="2600" dirty="0"/>
+          </a:p>
+        </p:txBody>
+      </p:sp>
+      <p:pic>
+        <p:nvPicPr>
+          <p:cNvPr id="4" name="Image 0" descr="C:\Users\ytaka\Desktop\開発\休憩管理アプリ\genba-mvp\docgen\logo_cropped.png">    </p:cNvPr>
+          <p:cNvPicPr>
+            <a:picLocks noChangeAspect="1"/>
+          </p:cNvPicPr>
+          <p:nvPr/>
+        </p:nvPicPr>
+        <p:blipFill>
+          <a:blip r:embed="rId1"/>
+          <a:stretch>
+            <a:fillRect/>
+          </a:stretch>
+        </p:blipFill>
+        <p:spPr>
+          <a:xfrm>
+            <a:off x="10451592" y="411480"/>
+            <a:ext cx="1097280" cy="358021"/>
+          </a:xfrm>
+          <a:prstGeom prst="rect">
+            <a:avLst/>
+          </a:prstGeom>
+        </p:spPr>
+      </p:pic>
+      <p:sp>
+        <p:nvSpPr>
+          <p:cNvPr id="5" name="Shape 2"/>
+          <p:cNvSpPr/>
+          <p:nvPr/>
+        </p:nvSpPr>
+        <p:spPr>
+          <a:xfrm>
+            <a:off x="640080" y="1737360"/>
+            <a:ext cx="10881360" cy="960120"/>
+          </a:xfrm>
+          <a:prstGeom prst="roundRect">
+            <a:avLst>
+              <a:gd name="adj" fmla="val 7619"/>
+            </a:avLst>
+          </a:prstGeom>
+          <a:solidFill>
+            <a:srgbClr val="F4F5F8"/>
+          </a:solidFill>
+          <a:ln w="12700">
+            <a:solidFill>
+              <a:srgbClr val="E2E5EE"/>
+            </a:solidFill>
+            <a:prstDash val="solid"/>
+          </a:ln>
+        </p:spPr>
+      </p:sp>
+      <p:sp>
+        <p:nvSpPr>
+          <p:cNvPr id="6" name="Text 3"/>
+          <p:cNvSpPr/>
+          <p:nvPr/>
+        </p:nvSpPr>
+        <p:spPr>
+          <a:xfrm>
+            <a:off x="868680" y="1810512"/>
+            <a:ext cx="10424160" cy="365760"/>
+          </a:xfrm>
+          <a:prstGeom prst="rect">
+            <a:avLst/>
+          </a:prstGeom>
+          <a:noFill/>
+          <a:ln/>
+        </p:spPr>
+        <p:txBody>
+          <a:bodyPr wrap="square" rtlCol="0" anchor="ctr"/>
+          <a:lstStyle/>
+          <a:p>
+            <a:pPr indent="0" marL="0">
+              <a:buNone/>
+            </a:pPr>
+            <a:r>
+              <a:rPr lang="en-US" sz="1400" b="1" dirty="0">
+                <a:solidFill>
+                  <a:srgbClr val="1B2333"/>
+                </a:solidFill>
+                <a:latin typeface="Meiryo" pitchFamily="34" charset="0"/>
+                <a:ea typeface="Meiryo" pitchFamily="34" charset="-122"/>
+                <a:cs typeface="Meiryo" pitchFamily="34" charset="-120"/>
+              </a:rPr>
+              <a:t>Q. 「プランを見る」が反応しない</a:t>
+            </a:r>
+            <a:endParaRPr lang="en-US" sz="1400" dirty="0"/>
+          </a:p>
+        </p:txBody>
+      </p:sp>
+      <p:sp>
+        <p:nvSpPr>
+          <p:cNvPr id="7" name="Text 4"/>
+          <p:cNvSpPr/>
+          <p:nvPr/>
+        </p:nvSpPr>
+        <p:spPr>
+          <a:xfrm>
+            <a:off x="868680" y="2194560"/>
+            <a:ext cx="10424160" cy="411480"/>
+          </a:xfrm>
+          <a:prstGeom prst="rect">
+            <a:avLst/>
+          </a:prstGeom>
+          <a:noFill/>
+          <a:ln/>
+        </p:spPr>
+        <p:txBody>
+          <a:bodyPr wrap="square" rtlCol="0" anchor="ctr"/>
+          <a:lstStyle/>
+          <a:p>
+            <a:pPr indent="0" marL="0">
+              <a:buNone/>
+            </a:pPr>
+            <a:r>
+              <a:rPr lang="en-US" sz="1300" dirty="0">
+                <a:solidFill>
+                  <a:srgbClr val="444444"/>
+                </a:solidFill>
+                <a:latin typeface="Meiryo" pitchFamily="34" charset="0"/>
+                <a:ea typeface="Meiryo" pitchFamily="34" charset="-122"/>
+                <a:cs typeface="Meiryo" pitchFamily="34" charset="-120"/>
+              </a:rPr>
+              <a:t>A. スマートフォンのブラウザキャッシュが古い可能性があります。一度タブを閉じて開き直してください</a:t>
+            </a:r>
+            <a:endParaRPr lang="en-US" sz="1300" dirty="0"/>
+          </a:p>
+        </p:txBody>
+      </p:sp>
+      <p:sp>
+        <p:nvSpPr>
+          <p:cNvPr id="8" name="Shape 5"/>
+          <p:cNvSpPr/>
+          <p:nvPr/>
+        </p:nvSpPr>
+        <p:spPr>
+          <a:xfrm>
+            <a:off x="640080" y="2880360"/>
+            <a:ext cx="10881360" cy="960120"/>
+          </a:xfrm>
+          <a:prstGeom prst="roundRect">
+            <a:avLst>
+              <a:gd name="adj" fmla="val 7619"/>
+            </a:avLst>
+          </a:prstGeom>
+          <a:solidFill>
+            <a:srgbClr val="F4F5F8"/>
+          </a:solidFill>
+          <a:ln w="12700">
+            <a:solidFill>
+              <a:srgbClr val="E2E5EE"/>
+            </a:solidFill>
+            <a:prstDash val="solid"/>
+          </a:ln>
+        </p:spPr>
+      </p:sp>
+      <p:sp>
+        <p:nvSpPr>
+          <p:cNvPr id="9" name="Text 6"/>
+          <p:cNvSpPr/>
+          <p:nvPr/>
+        </p:nvSpPr>
+        <p:spPr>
+          <a:xfrm>
+            <a:off x="868680" y="2953512"/>
+            <a:ext cx="10424160" cy="365760"/>
+          </a:xfrm>
+          <a:prstGeom prst="rect">
+            <a:avLst/>
+          </a:prstGeom>
+          <a:noFill/>
+          <a:ln/>
+        </p:spPr>
+        <p:txBody>
+          <a:bodyPr wrap="square" rtlCol="0" anchor="ctr"/>
+          <a:lstStyle/>
+          <a:p>
+            <a:pPr indent="0" marL="0">
+              <a:buNone/>
+            </a:pPr>
+            <a:r>
+              <a:rPr lang="en-US" sz="1400" b="1" dirty="0">
+                <a:solidFill>
+                  <a:srgbClr val="1B2333"/>
+                </a:solidFill>
+                <a:latin typeface="Meiryo" pitchFamily="34" charset="0"/>
+                <a:ea typeface="Meiryo" pitchFamily="34" charset="-122"/>
+                <a:cs typeface="Meiryo" pitchFamily="34" charset="-120"/>
+              </a:rPr>
+              <a:t>Q. チームを作成できない</a:t>
+            </a:r>
+            <a:endParaRPr lang="en-US" sz="1400" dirty="0"/>
+          </a:p>
+        </p:txBody>
+      </p:sp>
+      <p:sp>
+        <p:nvSpPr>
+          <p:cNvPr id="10" name="Text 7"/>
+          <p:cNvSpPr/>
+          <p:nvPr/>
+        </p:nvSpPr>
+        <p:spPr>
+          <a:xfrm>
+            <a:off x="868680" y="3337560"/>
+            <a:ext cx="10424160" cy="411480"/>
+          </a:xfrm>
+          <a:prstGeom prst="rect">
+            <a:avLst/>
+          </a:prstGeom>
+          <a:noFill/>
+          <a:ln/>
+        </p:spPr>
+        <p:txBody>
+          <a:bodyPr wrap="square" rtlCol="0" anchor="ctr"/>
+          <a:lstStyle/>
+          <a:p>
+            <a:pPr indent="0" marL="0">
+              <a:buNone/>
+            </a:pPr>
+            <a:r>
+              <a:rPr lang="en-US" sz="1300" dirty="0">
+                <a:solidFill>
+                  <a:srgbClr val="444444"/>
+                </a:solidFill>
+                <a:latin typeface="Meiryo" pitchFamily="34" charset="0"/>
+                <a:ea typeface="Meiryo" pitchFamily="34" charset="-122"/>
+                <a:cs typeface="Meiryo" pitchFamily="34" charset="-120"/>
+              </a:rPr>
+              <a:t>A. 無料枠(1日1件・月15件)を使い切っている可能性があります。プラン・課金画面で状況を確認してください</a:t>
+            </a:r>
+            <a:endParaRPr lang="en-US" sz="1300" dirty="0"/>
+          </a:p>
+        </p:txBody>
+      </p:sp>
+      <p:sp>
+        <p:nvSpPr>
+          <p:cNvPr id="11" name="Shape 8"/>
+          <p:cNvSpPr/>
+          <p:nvPr/>
+        </p:nvSpPr>
+        <p:spPr>
+          <a:xfrm>
+            <a:off x="640080" y="4023360"/>
+            <a:ext cx="10881360" cy="960120"/>
+          </a:xfrm>
+          <a:prstGeom prst="roundRect">
+            <a:avLst>
+              <a:gd name="adj" fmla="val 7619"/>
+            </a:avLst>
+          </a:prstGeom>
+          <a:solidFill>
+            <a:srgbClr val="F4F5F8"/>
+          </a:solidFill>
+          <a:ln w="12700">
+            <a:solidFill>
+              <a:srgbClr val="E2E5EE"/>
+            </a:solidFill>
+            <a:prstDash val="solid"/>
+          </a:ln>
+        </p:spPr>
+      </p:sp>
+      <p:sp>
+        <p:nvSpPr>
+          <p:cNvPr id="12" name="Text 9"/>
+          <p:cNvSpPr/>
+          <p:nvPr/>
+        </p:nvSpPr>
+        <p:spPr>
+          <a:xfrm>
+            <a:off x="868680" y="4096512"/>
+            <a:ext cx="10424160" cy="365760"/>
+          </a:xfrm>
+          <a:prstGeom prst="rect">
+            <a:avLst/>
+          </a:prstGeom>
+          <a:noFill/>
+          <a:ln/>
+        </p:spPr>
+        <p:txBody>
+          <a:bodyPr wrap="square" rtlCol="0" anchor="ctr"/>
+          <a:lstStyle/>
+          <a:p>
+            <a:pPr indent="0" marL="0">
+              <a:buNone/>
+            </a:pPr>
+            <a:r>
+              <a:rPr lang="en-US" sz="1400" b="1" dirty="0">
+                <a:solidFill>
+                  <a:srgbClr val="1B2333"/>
+                </a:solidFill>
+                <a:latin typeface="Meiryo" pitchFamily="34" charset="0"/>
+                <a:ea typeface="Meiryo" pitchFamily="34" charset="-122"/>
+                <a:cs typeface="Meiryo" pitchFamily="34" charset="-120"/>
+              </a:rPr>
+              <a:t>Q. AI提案が使えない</a:t>
+            </a:r>
+            <a:endParaRPr lang="en-US" sz="1400" dirty="0"/>
+          </a:p>
+        </p:txBody>
+      </p:sp>
+      <p:sp>
+        <p:nvSpPr>
+          <p:cNvPr id="13" name="Text 10"/>
+          <p:cNvSpPr/>
+          <p:nvPr/>
+        </p:nvSpPr>
+        <p:spPr>
+          <a:xfrm>
+            <a:off x="868680" y="4480560"/>
+            <a:ext cx="10424160" cy="411480"/>
+          </a:xfrm>
+          <a:prstGeom prst="rect">
+            <a:avLst/>
+          </a:prstGeom>
+          <a:noFill/>
+          <a:ln/>
+        </p:spPr>
+        <p:txBody>
+          <a:bodyPr wrap="square" rtlCol="0" anchor="ctr"/>
+          <a:lstStyle/>
+          <a:p>
+            <a:pPr indent="0" marL="0">
+              <a:buNone/>
+            </a:pPr>
+            <a:r>
+              <a:rPr lang="en-US" sz="1300" dirty="0">
+                <a:solidFill>
+                  <a:srgbClr val="444444"/>
+                </a:solidFill>
+                <a:latin typeface="Meiryo" pitchFamily="34" charset="0"/>
+                <a:ea typeface="Meiryo" pitchFamily="34" charset="-122"/>
+                <a:cs typeface="Meiryo" pitchFamily="34" charset="-120"/>
+              </a:rPr>
+              <a:t>A. チームの管理者設定でAI提案がOFFになっているか、利用枠が不足している可能性があります</a:t>
+            </a:r>
+            <a:endParaRPr lang="en-US" sz="1300" dirty="0"/>
+          </a:p>
+        </p:txBody>
+      </p:sp>
+      <p:sp>
+        <p:nvSpPr>
+          <p:cNvPr id="14" name="Shape 11"/>
+          <p:cNvSpPr/>
+          <p:nvPr/>
+        </p:nvSpPr>
+        <p:spPr>
+          <a:xfrm>
+            <a:off x="640080" y="5166360"/>
+            <a:ext cx="10881360" cy="960120"/>
+          </a:xfrm>
+          <a:prstGeom prst="roundRect">
+            <a:avLst>
+              <a:gd name="adj" fmla="val 7619"/>
+            </a:avLst>
+          </a:prstGeom>
+          <a:solidFill>
+            <a:srgbClr val="F4F5F8"/>
+          </a:solidFill>
+          <a:ln w="12700">
+            <a:solidFill>
+              <a:srgbClr val="E2E5EE"/>
+            </a:solidFill>
+            <a:prstDash val="solid"/>
+          </a:ln>
+        </p:spPr>
+      </p:sp>
+      <p:sp>
+        <p:nvSpPr>
+          <p:cNvPr id="15" name="Text 12"/>
+          <p:cNvSpPr/>
+          <p:nvPr/>
+        </p:nvSpPr>
+        <p:spPr>
+          <a:xfrm>
+            <a:off x="868680" y="5239512"/>
+            <a:ext cx="10424160" cy="365760"/>
+          </a:xfrm>
+          <a:prstGeom prst="rect">
+            <a:avLst/>
+          </a:prstGeom>
+          <a:noFill/>
+          <a:ln/>
+        </p:spPr>
+        <p:txBody>
+          <a:bodyPr wrap="square" rtlCol="0" anchor="ctr"/>
+          <a:lstStyle/>
+          <a:p>
+            <a:pPr indent="0" marL="0">
+              <a:buNone/>
+            </a:pPr>
+            <a:r>
+              <a:rPr lang="en-US" sz="1400" b="1" dirty="0">
+                <a:solidFill>
+                  <a:srgbClr val="1B2333"/>
+                </a:solidFill>
+                <a:latin typeface="Meiryo" pitchFamily="34" charset="0"/>
+                <a:ea typeface="Meiryo" pitchFamily="34" charset="-122"/>
+                <a:cs typeface="Meiryo" pitchFamily="34" charset="-120"/>
+              </a:rPr>
+              <a:t>Q. 招待されたのにチームが開けない</a:t>
+            </a:r>
+            <a:endParaRPr lang="en-US" sz="1400" dirty="0"/>
+          </a:p>
+        </p:txBody>
+      </p:sp>
+      <p:sp>
+        <p:nvSpPr>
+          <p:cNvPr id="16" name="Text 13"/>
+          <p:cNvSpPr/>
+          <p:nvPr/>
+        </p:nvSpPr>
+        <p:spPr>
+          <a:xfrm>
+            <a:off x="868680" y="5623560"/>
+            <a:ext cx="10424160" cy="411480"/>
+          </a:xfrm>
+          <a:prstGeom prst="rect">
+            <a:avLst/>
+          </a:prstGeom>
+          <a:noFill/>
+          <a:ln/>
+        </p:spPr>
+        <p:txBody>
+          <a:bodyPr wrap="square" rtlCol="0" anchor="ctr"/>
+          <a:lstStyle/>
+          <a:p>
+            <a:pPr indent="0" marL="0">
+              <a:buNone/>
+            </a:pPr>
+            <a:r>
+              <a:rPr lang="en-US" sz="1300" dirty="0">
+                <a:solidFill>
+                  <a:srgbClr val="444444"/>
+                </a:solidFill>
+                <a:latin typeface="Meiryo" pitchFamily="34" charset="0"/>
+                <a:ea typeface="Meiryo" pitchFamily="34" charset="-122"/>
+                <a:cs typeface="Meiryo" pitchFamily="34" charset="-120"/>
+              </a:rPr>
+              <a:t>A. QRコード・URLの有効期限切れ、またはチームが削除された可能性があります。発行者に確認してください</a:t>
+            </a:r>
+            <a:endParaRPr lang="en-US" sz="1300" dirty="0"/>
+          </a:p>
+        </p:txBody>
+      </p:sp>
+    </p:spTree>
+  </p:cSld>
+  <p:clrMapOvr>
+    <a:masterClrMapping/>
+  </p:clrMapOvr>
+</p:sld>
+</file>
+
+<file path=ppt/slides/slide31.xml><?xml version="1.0" encoding="utf-8"?>
+<p:sld xmlns:a="http://schemas.openxmlformats.org/drawingml/2006/main" xmlns:r="http://schemas.openxmlformats.org/officeDocument/2006/relationships" xmlns:p="http://schemas.openxmlformats.org/presentationml/2006/main">
+  <p:cSld name="Slide 31">
+    <p:bg>
+      <p:bgPr>
+        <a:solidFill>
+          <a:srgbClr val="1B2333"/>
+        </a:solidFill>
+      </p:bgPr>
+    </p:bg>
+    <p:spTree>
+      <p:nvGrpSpPr>
+        <p:cNvPr id="1" name=""/>
+        <p:cNvGrpSpPr/>
+        <p:nvPr/>
+      </p:nvGrpSpPr>
+      <p:grpSpPr>
+        <a:xfrm>
+          <a:off x="0" y="0"/>
+          <a:ext cx="0" cy="0"/>
+          <a:chOff x="0" y="0"/>
+          <a:chExt cx="0" cy="0"/>
+        </a:xfrm>
+      </p:grpSpPr>
+      <p:pic>
+        <p:nvPicPr>
+          <p:cNvPr id="2" name="Image 0" descr="C:\Users\ytaka\Desktop\開発\休憩管理アプリ\genba-mvp\docgen\logo_cropped.png">    </p:cNvPr>
+          <p:cNvPicPr>
+            <a:picLocks noChangeAspect="1"/>
+          </p:cNvPicPr>
+          <p:nvPr/>
+        </p:nvPicPr>
+        <p:blipFill>
+          <a:blip r:embed="rId1"/>
+          <a:stretch>
+            <a:fillRect/>
+          </a:stretch>
+        </p:blipFill>
+        <p:spPr>
+          <a:xfrm>
+            <a:off x="4722876" y="2377440"/>
+            <a:ext cx="2743200" cy="895053"/>
+          </a:xfrm>
+          <a:prstGeom prst="rect">
+            <a:avLst/>
+          </a:prstGeom>
+        </p:spPr>
+      </p:pic>
+      <p:sp>
+        <p:nvSpPr>
+          <p:cNvPr id="3" name="Text 0"/>
+          <p:cNvSpPr/>
+          <p:nvPr/>
+        </p:nvSpPr>
+        <p:spPr>
+          <a:xfrm>
+            <a:off x="640080" y="3840480"/>
+            <a:ext cx="10881360" cy="548640"/>
+          </a:xfrm>
+          <a:prstGeom prst="rect">
+            <a:avLst/>
+          </a:prstGeom>
+          <a:noFill/>
+          <a:ln/>
+        </p:spPr>
+        <p:txBody>
+          <a:bodyPr wrap="square" rtlCol="0" anchor="ctr"/>
+          <a:lstStyle/>
+          <a:p>
+            <a:pPr algn="ctr" indent="0" marL="0">
+              <a:buNone/>
+            </a:pPr>
+            <a:r>
+              <a:rPr lang="en-US" sz="1600" dirty="0">
+                <a:solidFill>
+                  <a:srgbClr val="AEB8D4"/>
+                </a:solidFill>
+                <a:latin typeface="Meiryo" pitchFamily="34" charset="0"/>
+                <a:ea typeface="Meiryo" pitchFamily="34" charset="-122"/>
+                <a:cs typeface="Meiryo" pitchFamily="34" charset="-120"/>
+              </a:rPr>
+              <a:t>ご不明な点はAster Systems(吉崎)までご連絡ください</a:t>
+            </a:r>
+            <a:endParaRPr lang="en-US" sz="1600" dirty="0"/>
+          </a:p>
+        </p:txBody>
+      </p:sp>
+    </p:spTree>
+  </p:cSld>
+  <p:clrMapOvr>
+    <a:masterClrMapping/>
+  </p:clrMapOvr>
+</p:sld>
+</file>
+
 <file path=ppt/slides/slide4.xml><?xml version="1.0" encoding="utf-8"?>
 <p:sld xmlns:a="http://schemas.openxmlformats.org/drawingml/2006/main" xmlns:r="http://schemas.openxmlformats.org/officeDocument/2006/relationships" xmlns:p="http://schemas.openxmlformats.org/presentationml/2006/main">
   <p:cSld name="Slide 4">
@@ -8978,7 +9548,7 @@
                 <a:ea typeface="Meiryo" pitchFamily="34" charset="-122"/>
                 <a:cs typeface="Meiryo" pitchFamily="34" charset="-120"/>
               </a:rPr>
-              <a:t>チーム作成(オーナー向け)</a:t>
+              <a:t>Googleログイン・2段階認証</a:t>
             </a:r>
             <a:endParaRPr lang="en-US" sz="3400" dirty="0"/>
           </a:p>
@@ -9088,7 +9658,7 @@
                 <a:ea typeface="Meiryo" pitchFamily="34" charset="-122"/>
                 <a:cs typeface="Meiryo" pitchFamily="34" charset="-120"/>
               </a:rPr>
-              <a:t>現場(チーム)を作る</a:t>
+              <a:t>Googleアカウントでログイン/2段階認証を設定する</a:t>
             </a:r>
             <a:endParaRPr lang="en-US" sz="2600" dirty="0"/>
           </a:p>
@@ -9127,7 +9697,7 @@
         <p:spPr>
           <a:xfrm>
             <a:off x="640080" y="1737360"/>
-            <a:ext cx="10881360" cy="4389120"/>
+            <a:ext cx="10881360" cy="4480560"/>
           </a:xfrm>
           <a:prstGeom prst="rect">
             <a:avLst/>
@@ -9147,7 +9717,7 @@
               <a:buChar char="●"/>
             </a:pPr>
             <a:r>
-              <a:rPr lang="en-US" sz="1600" dirty="0">
+              <a:rPr lang="en-US" sz="1500" dirty="0">
                 <a:solidFill>
                   <a:srgbClr val="333333"/>
                 </a:solidFill>
@@ -9155,9 +9725,9 @@
                 <a:ea typeface="Meiryo" pitchFamily="34" charset="-122"/>
                 <a:cs typeface="Meiryo" pitchFamily="34" charset="-120"/>
               </a:rPr>
-              <a:t>「チーム一覧」画面の「＋チーム作成」から、現場名・会場名・開催日を入力</a:t>
-            </a:r>
-            <a:endParaRPr lang="en-US" sz="1600" dirty="0"/>
+              <a:t>ログイン画面の「Googleでログイン」を押すと、Googleのログイン画面に移動して認証できます(パスワードの入力は不要)</a:t>
+            </a:r>
+            <a:endParaRPr lang="en-US" sz="1500" dirty="0"/>
           </a:p>
           <a:p>
             <a:pPr marL="228600" indent="-228600">
@@ -9168,7 +9738,7 @@
               <a:buChar char="●"/>
             </a:pPr>
             <a:r>
-              <a:rPr lang="en-US" sz="1600" dirty="0">
+              <a:rPr lang="en-US" sz="1500" dirty="0">
                 <a:solidFill>
                   <a:srgbClr val="333333"/>
                 </a:solidFill>
@@ -9176,9 +9746,9 @@
                 <a:ea typeface="Meiryo" pitchFamily="34" charset="-122"/>
                 <a:cs typeface="Meiryo" pitchFamily="34" charset="-120"/>
               </a:rPr>
-              <a:t>AI提案を使いたい場合はスイッチをON(課金プランが必要です)</a:t>
-            </a:r>
-            <a:endParaRPr lang="en-US" sz="1600" dirty="0"/>
+              <a:t>同じメールアドレスで既にアカウントをお持ちの場合は、自動的にそのアカウントと連携されます</a:t>
+            </a:r>
+            <a:endParaRPr lang="en-US" sz="1500" dirty="0"/>
           </a:p>
           <a:p>
             <a:pPr marL="228600" indent="-228600">
@@ -9189,7 +9759,7 @@
               <a:buChar char="●"/>
             </a:pPr>
             <a:r>
-              <a:rPr lang="en-US" sz="1600" dirty="0">
+              <a:rPr lang="en-US" sz="1500" dirty="0">
                 <a:solidFill>
                   <a:srgbClr val="333333"/>
                 </a:solidFill>
@@ -9197,9 +9767,9 @@
                 <a:ea typeface="Meiryo" pitchFamily="34" charset="-122"/>
                 <a:cs typeface="Meiryo" pitchFamily="34" charset="-120"/>
               </a:rPr>
-              <a:t>作成すると、参加用のQRコードと共有URLが発行されます</a:t>
-            </a:r>
-            <a:endParaRPr lang="en-US" sz="1600" dirty="0"/>
+              <a:t>新規登録直後、2段階認証の設定案内が表示されます(その場で設定してもスキップして後で設定してもかまいません)</a:t>
+            </a:r>
+            <a:endParaRPr lang="en-US" sz="1500" dirty="0"/>
           </a:p>
           <a:p>
             <a:pPr marL="228600" indent="-228600">
@@ -9210,7 +9780,7 @@
               <a:buChar char="●"/>
             </a:pPr>
             <a:r>
-              <a:rPr lang="en-US" sz="1600" dirty="0">
+              <a:rPr lang="en-US" sz="1500" dirty="0">
                 <a:solidFill>
                   <a:srgbClr val="333333"/>
                 </a:solidFill>
@@ -9218,9 +9788,9 @@
                 <a:ea typeface="Meiryo" pitchFamily="34" charset="-122"/>
                 <a:cs typeface="Meiryo" pitchFamily="34" charset="-120"/>
               </a:rPr>
-              <a:t>URLをLINE等でスタッフに共有するだけで、相手はアカウント不要ですぐ参加できます</a:t>
-            </a:r>
-            <a:endParaRPr lang="en-US" sz="1600" dirty="0"/>
+              <a:t>設定する場合は、認証アプリ(Google Authenticator等)でQRコードを読み取り、表示された6桁コードを入力すると有効化されます</a:t>
+            </a:r>
+            <a:endParaRPr lang="en-US" sz="1500" dirty="0"/>
           </a:p>
           <a:p>
             <a:pPr marL="228600" indent="-228600">
@@ -9231,7 +9801,7 @@
               <a:buChar char="●"/>
             </a:pPr>
             <a:r>
-              <a:rPr lang="en-US" sz="1600" dirty="0">
+              <a:rPr lang="en-US" sz="1500" dirty="0">
                 <a:solidFill>
                   <a:srgbClr val="333333"/>
                 </a:solidFill>
@@ -9239,9 +9809,51 @@
                 <a:ea typeface="Meiryo" pitchFamily="34" charset="-122"/>
                 <a:cs typeface="Meiryo" pitchFamily="34" charset="-120"/>
               </a:rPr>
-              <a:t>チーム作成には利用回数の制限があります(プラン・課金画面で確認できます)</a:t>
-            </a:r>
-            <a:endParaRPr lang="en-US" sz="1600" dirty="0"/>
+              <a:t>有効化すると、次回以降のログイン時に認証アプリの6桁コードの入力が必要になります(なりすまし防止)</a:t>
+            </a:r>
+            <a:endParaRPr lang="en-US" sz="1500" dirty="0"/>
+          </a:p>
+          <a:p>
+            <a:pPr marL="228600" indent="-228600">
+              <a:spcAft>
+                <a:spcPts val="1000"/>
+              </a:spcAft>
+              <a:buSzPct val="100000"/>
+              <a:buChar char="●"/>
+            </a:pPr>
+            <a:r>
+              <a:rPr lang="en-US" sz="1500" dirty="0">
+                <a:solidFill>
+                  <a:srgbClr val="333333"/>
+                </a:solidFill>
+                <a:latin typeface="Meiryo" pitchFamily="34" charset="0"/>
+                <a:ea typeface="Meiryo" pitchFamily="34" charset="-122"/>
+                <a:cs typeface="Meiryo" pitchFamily="34" charset="-120"/>
+              </a:rPr>
+              <a:t>認証アプリが手元にない場合に備えて、バックアップコード(8個・1回限り使用)が発行されます。必ず控えておいてください</a:t>
+            </a:r>
+            <a:endParaRPr lang="en-US" sz="1500" dirty="0"/>
+          </a:p>
+          <a:p>
+            <a:pPr marL="228600" indent="-228600">
+              <a:spcAft>
+                <a:spcPts val="1000"/>
+              </a:spcAft>
+              <a:buSzPct val="100000"/>
+              <a:buChar char="●"/>
+            </a:pPr>
+            <a:r>
+              <a:rPr lang="en-US" sz="1500" dirty="0">
+                <a:solidFill>
+                  <a:srgbClr val="333333"/>
+                </a:solidFill>
+                <a:latin typeface="Meiryo" pitchFamily="34" charset="0"/>
+                <a:ea typeface="Meiryo" pitchFamily="34" charset="-122"/>
+                <a:cs typeface="Meiryo" pitchFamily="34" charset="-120"/>
+              </a:rPr>
+              <a:t>2段階認証はマイページの「セキュリティ設定」からいつでもON/OFFを切り替えられます</a:t>
+            </a:r>
+            <a:endParaRPr lang="en-US" sz="1500" dirty="0"/>
           </a:p>
         </p:txBody>
       </p:sp>
@@ -9349,7 +9961,7 @@
                 <a:ea typeface="Meiryo" pitchFamily="34" charset="-122"/>
                 <a:cs typeface="Meiryo" pitchFamily="34" charset="-120"/>
               </a:rPr>
-              <a:t>Command Center(管理者向け)</a:t>
+              <a:t>チーム作成(オーナー向け)</a:t>
             </a:r>
             <a:endParaRPr lang="en-US" sz="3400" dirty="0"/>
           </a:p>
